--- a/docs/PuzzleForge_Presentation.pptx
+++ b/docs/PuzzleForge_Presentation.pptx
@@ -7,8 +7,8 @@
   <p:sldIdLst>
     <p:sldId id="256" r:id="rId2"/>
     <p:sldId id="257" r:id="rId3"/>
-    <p:sldId id="258" r:id="rId4"/>
-    <p:sldId id="259" r:id="rId5"/>
+    <p:sldId id="259" r:id="rId4"/>
+    <p:sldId id="258" r:id="rId5"/>
     <p:sldId id="260" r:id="rId6"/>
     <p:sldId id="261" r:id="rId7"/>
     <p:sldId id="262" r:id="rId8"/>
@@ -311,7 +311,7 @@
           <a:p>
             <a:fld id="{5BCAD085-E8A6-8845-BD4E-CB4CCA059FC4}" type="datetimeFigureOut">
               <a:rPr lang="en-US" smtClean="0"/>
-              <a:t>4/14/26</a:t>
+              <a:t>4/20/26</a:t>
             </a:fld>
             <a:endParaRPr lang="en-US"/>
           </a:p>
@@ -479,7 +479,7 @@
           <a:p>
             <a:fld id="{5BCAD085-E8A6-8845-BD4E-CB4CCA059FC4}" type="datetimeFigureOut">
               <a:rPr lang="en-US" smtClean="0"/>
-              <a:t>4/14/26</a:t>
+              <a:t>4/20/26</a:t>
             </a:fld>
             <a:endParaRPr lang="en-US"/>
           </a:p>
@@ -657,7 +657,7 @@
           <a:p>
             <a:fld id="{5BCAD085-E8A6-8845-BD4E-CB4CCA059FC4}" type="datetimeFigureOut">
               <a:rPr lang="en-US" smtClean="0"/>
-              <a:t>4/14/26</a:t>
+              <a:t>4/20/26</a:t>
             </a:fld>
             <a:endParaRPr lang="en-US"/>
           </a:p>
@@ -825,7 +825,7 @@
           <a:p>
             <a:fld id="{5BCAD085-E8A6-8845-BD4E-CB4CCA059FC4}" type="datetimeFigureOut">
               <a:rPr lang="en-US" smtClean="0"/>
-              <a:t>4/14/26</a:t>
+              <a:t>4/20/26</a:t>
             </a:fld>
             <a:endParaRPr lang="en-US"/>
           </a:p>
@@ -1070,7 +1070,7 @@
           <a:p>
             <a:fld id="{5BCAD085-E8A6-8845-BD4E-CB4CCA059FC4}" type="datetimeFigureOut">
               <a:rPr lang="en-US" smtClean="0"/>
-              <a:t>4/14/26</a:t>
+              <a:t>4/20/26</a:t>
             </a:fld>
             <a:endParaRPr lang="en-US"/>
           </a:p>
@@ -1355,7 +1355,7 @@
           <a:p>
             <a:fld id="{5BCAD085-E8A6-8845-BD4E-CB4CCA059FC4}" type="datetimeFigureOut">
               <a:rPr lang="en-US" smtClean="0"/>
-              <a:t>4/14/26</a:t>
+              <a:t>4/20/26</a:t>
             </a:fld>
             <a:endParaRPr lang="en-US"/>
           </a:p>
@@ -1774,7 +1774,7 @@
           <a:p>
             <a:fld id="{5BCAD085-E8A6-8845-BD4E-CB4CCA059FC4}" type="datetimeFigureOut">
               <a:rPr lang="en-US" smtClean="0"/>
-              <a:t>4/14/26</a:t>
+              <a:t>4/20/26</a:t>
             </a:fld>
             <a:endParaRPr lang="en-US"/>
           </a:p>
@@ -1891,7 +1891,7 @@
           <a:p>
             <a:fld id="{5BCAD085-E8A6-8845-BD4E-CB4CCA059FC4}" type="datetimeFigureOut">
               <a:rPr lang="en-US" smtClean="0"/>
-              <a:t>4/14/26</a:t>
+              <a:t>4/20/26</a:t>
             </a:fld>
             <a:endParaRPr lang="en-US"/>
           </a:p>
@@ -1986,7 +1986,7 @@
           <a:p>
             <a:fld id="{5BCAD085-E8A6-8845-BD4E-CB4CCA059FC4}" type="datetimeFigureOut">
               <a:rPr lang="en-US" smtClean="0"/>
-              <a:t>4/14/26</a:t>
+              <a:t>4/20/26</a:t>
             </a:fld>
             <a:endParaRPr lang="en-US"/>
           </a:p>
@@ -2261,7 +2261,7 @@
           <a:p>
             <a:fld id="{5BCAD085-E8A6-8845-BD4E-CB4CCA059FC4}" type="datetimeFigureOut">
               <a:rPr lang="en-US" smtClean="0"/>
-              <a:t>4/14/26</a:t>
+              <a:t>4/20/26</a:t>
             </a:fld>
             <a:endParaRPr lang="en-US"/>
           </a:p>
@@ -2513,7 +2513,7 @@
           <a:p>
             <a:fld id="{5BCAD085-E8A6-8845-BD4E-CB4CCA059FC4}" type="datetimeFigureOut">
               <a:rPr lang="en-US" smtClean="0"/>
-              <a:t>4/14/26</a:t>
+              <a:t>4/20/26</a:t>
             </a:fld>
             <a:endParaRPr lang="en-US"/>
           </a:p>
@@ -2724,7 +2724,7 @@
           <a:p>
             <a:fld id="{5BCAD085-E8A6-8845-BD4E-CB4CCA059FC4}" type="datetimeFigureOut">
               <a:rPr lang="en-US" smtClean="0"/>
-              <a:t>4/14/26</a:t>
+              <a:t>4/20/26</a:t>
             </a:fld>
             <a:endParaRPr lang="en-US"/>
           </a:p>
@@ -4467,7 +4467,7 @@
               </a:defRPr>
             </a:pPr>
             <a:r>
-              <a:t>Architecture</a:t>
+              <a:t>Five Coordinated Agents</a:t>
             </a:r>
           </a:p>
         </p:txBody>
@@ -4524,14 +4524,14 @@
         </p:nvSpPr>
         <p:spPr>
           <a:xfrm>
-            <a:off x="274320" y="1828800"/>
-            <a:ext cx="1645920" cy="822960"/>
+            <a:off x="457200" y="1371600"/>
+            <a:ext cx="2011680" cy="4572000"/>
           </a:xfrm>
           <a:prstGeom prst="roundRect">
             <a:avLst/>
           </a:prstGeom>
           <a:solidFill>
-            <a:srgbClr val="8888AA"/>
+            <a:srgbClr val="16213E"/>
           </a:solidFill>
           <a:ln>
             <a:noFill/>
@@ -4553,11 +4553,38 @@
           </a:fontRef>
         </p:style>
         <p:txBody>
-          <a:bodyPr wrap="square" rtlCol="0" anchor="ctr"/>
+          <a:bodyPr rtlCol="0" anchor="ctr"/>
+          <a:lstStyle/>
+          <a:p>
+            <a:pPr algn="ctr"/>
+            <a:endParaRPr/>
+          </a:p>
+        </p:txBody>
+      </p:sp>
+      <p:sp>
+        <p:nvSpPr>
+          <p:cNvPr id="5" name="TextBox 4"/>
+          <p:cNvSpPr txBox="1"/>
+          <p:nvPr/>
+        </p:nvSpPr>
+        <p:spPr>
+          <a:xfrm>
+            <a:off x="457200" y="1463040"/>
+            <a:ext cx="2011680" cy="640080"/>
+          </a:xfrm>
+          <a:prstGeom prst="rect">
+            <a:avLst/>
+          </a:prstGeom>
+          <a:noFill/>
+        </p:spPr>
+        <p:txBody>
+          <a:bodyPr wrap="square">
+            <a:spAutoFit/>
+          </a:bodyPr>
           <a:lstStyle/>
           <a:p>
             <a:pPr algn="ctr">
-              <a:defRPr sz="1400" b="1">
+              <a:defRPr sz="3200" b="0">
                 <a:solidFill>
                   <a:srgbClr val="FFFFFF"/>
                 </a:solidFill>
@@ -4565,21 +4592,57 @@
               </a:defRPr>
             </a:pPr>
             <a:r>
-              <a:t>User Input</a:t>
-            </a:r>
-          </a:p>
-        </p:txBody>
-      </p:sp>
-      <p:sp>
-        <p:nvSpPr>
-          <p:cNvPr id="5" name="Rounded Rectangle 4"/>
+              <a:t>🎨</a:t>
+            </a:r>
+          </a:p>
+        </p:txBody>
+      </p:sp>
+      <p:sp>
+        <p:nvSpPr>
+          <p:cNvPr id="6" name="TextBox 5"/>
+          <p:cNvSpPr txBox="1"/>
+          <p:nvPr/>
+        </p:nvSpPr>
+        <p:spPr>
+          <a:xfrm>
+            <a:off x="457200" y="2011680"/>
+            <a:ext cx="2011680" cy="457200"/>
+          </a:xfrm>
+          <a:prstGeom prst="rect">
+            <a:avLst/>
+          </a:prstGeom>
+          <a:noFill/>
+        </p:spPr>
+        <p:txBody>
+          <a:bodyPr wrap="square">
+            <a:spAutoFit/>
+          </a:bodyPr>
+          <a:lstStyle/>
+          <a:p>
+            <a:pPr algn="ctr">
+              <a:defRPr sz="1600" b="1">
+                <a:solidFill>
+                  <a:srgbClr val="FFFFFF"/>
+                </a:solidFill>
+                <a:latin typeface="Calibri"/>
+              </a:defRPr>
+            </a:pPr>
+            <a:r>
+              <a:t>Game Designer</a:t>
+            </a:r>
+          </a:p>
+        </p:txBody>
+      </p:sp>
+      <p:sp>
+        <p:nvSpPr>
+          <p:cNvPr id="7" name="Rounded Rectangle 6"/>
           <p:cNvSpPr/>
           <p:nvPr/>
         </p:nvSpPr>
         <p:spPr>
           <a:xfrm>
-            <a:off x="2286000" y="1828800"/>
-            <a:ext cx="1645920" cy="822960"/>
+            <a:off x="731520" y="2514600"/>
+            <a:ext cx="1463040" cy="320040"/>
           </a:xfrm>
           <a:prstGeom prst="roundRect">
             <a:avLst/>
@@ -4607,11 +4670,11 @@
           </a:fontRef>
         </p:style>
         <p:txBody>
-          <a:bodyPr wrap="square" rtlCol="0" anchor="ctr"/>
+          <a:bodyPr rtlCol="0" anchor="ctr"/>
           <a:lstStyle/>
           <a:p>
             <a:pPr algn="ctr">
-              <a:defRPr sz="1400" b="1">
+              <a:defRPr sz="1000">
                 <a:solidFill>
                   <a:srgbClr val="FFFFFF"/>
                 </a:solidFill>
@@ -4619,25 +4682,214 @@
               </a:defRPr>
             </a:pPr>
             <a:r>
-              <a:t>Game</a:t>
+              <a:t>Design Layer</a:t>
+            </a:r>
+          </a:p>
+        </p:txBody>
+      </p:sp>
+      <p:sp>
+        <p:nvSpPr>
+          <p:cNvPr id="8" name="TextBox 7"/>
+          <p:cNvSpPr txBox="1"/>
+          <p:nvPr/>
+        </p:nvSpPr>
+        <p:spPr>
+          <a:xfrm>
+            <a:off x="548640" y="3017520"/>
+            <a:ext cx="1828800" cy="365760"/>
+          </a:xfrm>
+          <a:prstGeom prst="rect">
+            <a:avLst/>
+          </a:prstGeom>
+          <a:noFill/>
+        </p:spPr>
+        <p:txBody>
+          <a:bodyPr wrap="square">
+            <a:spAutoFit/>
+          </a:bodyPr>
+          <a:lstStyle/>
+          <a:p>
+            <a:pPr algn="ctr">
+              <a:defRPr sz="1200" b="1">
+                <a:solidFill>
+                  <a:srgbClr val="00D2FF"/>
+                </a:solidFill>
+                <a:latin typeface="Calibri"/>
+              </a:defRPr>
+            </a:pPr>
+            <a:r>
+              <a:t>LLM (temp 0.8)</a:t>
+            </a:r>
+          </a:p>
+        </p:txBody>
+      </p:sp>
+      <p:sp>
+        <p:nvSpPr>
+          <p:cNvPr id="9" name="TextBox 8"/>
+          <p:cNvSpPr txBox="1"/>
+          <p:nvPr/>
+        </p:nvSpPr>
+        <p:spPr>
+          <a:xfrm>
+            <a:off x="548640" y="3383280"/>
+            <a:ext cx="1828800" cy="2286000"/>
+          </a:xfrm>
+          <a:prstGeom prst="rect">
+            <a:avLst/>
+          </a:prstGeom>
+          <a:noFill/>
+        </p:spPr>
+        <p:txBody>
+          <a:bodyPr wrap="square">
+            <a:spAutoFit/>
+          </a:bodyPr>
+          <a:lstStyle/>
+          <a:p>
+            <a:pPr algn="ctr">
+              <a:defRPr sz="1300" b="0">
+                <a:solidFill>
+                  <a:srgbClr val="BBBBCC"/>
+                </a:solidFill>
+                <a:latin typeface="Calibri"/>
+              </a:defRPr>
+            </a:pPr>
+            <a:r>
+              <a:t>Chooses push/slide mechanic</a:t>
             </a:r>
             <a:br/>
             <a:r>
-              <a:t>Designer</a:t>
-            </a:r>
-          </a:p>
-        </p:txBody>
-      </p:sp>
-      <p:sp>
-        <p:nvSpPr>
-          <p:cNvPr id="6" name="Rounded Rectangle 5"/>
+              <a:t>Designs visual theme &amp; emojis</a:t>
+            </a:r>
+          </a:p>
+        </p:txBody>
+      </p:sp>
+      <p:sp>
+        <p:nvSpPr>
+          <p:cNvPr id="10" name="Rounded Rectangle 9"/>
           <p:cNvSpPr/>
           <p:nvPr/>
         </p:nvSpPr>
         <p:spPr>
           <a:xfrm>
-            <a:off x="4297680" y="1828800"/>
-            <a:ext cx="1645920" cy="822960"/>
+            <a:off x="2743200" y="1371600"/>
+            <a:ext cx="2011680" cy="4572000"/>
+          </a:xfrm>
+          <a:prstGeom prst="roundRect">
+            <a:avLst/>
+          </a:prstGeom>
+          <a:solidFill>
+            <a:srgbClr val="16213E"/>
+          </a:solidFill>
+          <a:ln>
+            <a:noFill/>
+          </a:ln>
+          <a:effectLst/>
+        </p:spPr>
+        <p:style>
+          <a:lnRef idx="1">
+            <a:schemeClr val="accent1"/>
+          </a:lnRef>
+          <a:fillRef idx="3">
+            <a:schemeClr val="accent1"/>
+          </a:fillRef>
+          <a:effectRef idx="2">
+            <a:schemeClr val="accent1"/>
+          </a:effectRef>
+          <a:fontRef idx="minor">
+            <a:schemeClr val="lt1"/>
+          </a:fontRef>
+        </p:style>
+        <p:txBody>
+          <a:bodyPr rtlCol="0" anchor="ctr"/>
+          <a:lstStyle/>
+          <a:p>
+            <a:pPr algn="ctr"/>
+            <a:endParaRPr/>
+          </a:p>
+        </p:txBody>
+      </p:sp>
+      <p:sp>
+        <p:nvSpPr>
+          <p:cNvPr id="11" name="TextBox 10"/>
+          <p:cNvSpPr txBox="1"/>
+          <p:nvPr/>
+        </p:nvSpPr>
+        <p:spPr>
+          <a:xfrm>
+            <a:off x="2743200" y="1463040"/>
+            <a:ext cx="2011680" cy="640080"/>
+          </a:xfrm>
+          <a:prstGeom prst="rect">
+            <a:avLst/>
+          </a:prstGeom>
+          <a:noFill/>
+        </p:spPr>
+        <p:txBody>
+          <a:bodyPr wrap="square">
+            <a:spAutoFit/>
+          </a:bodyPr>
+          <a:lstStyle/>
+          <a:p>
+            <a:pPr algn="ctr">
+              <a:defRPr sz="3200" b="0">
+                <a:solidFill>
+                  <a:srgbClr val="FFFFFF"/>
+                </a:solidFill>
+                <a:latin typeface="Calibri"/>
+              </a:defRPr>
+            </a:pPr>
+            <a:r>
+              <a:t>🏗️</a:t>
+            </a:r>
+          </a:p>
+        </p:txBody>
+      </p:sp>
+      <p:sp>
+        <p:nvSpPr>
+          <p:cNvPr id="12" name="TextBox 11"/>
+          <p:cNvSpPr txBox="1"/>
+          <p:nvPr/>
+        </p:nvSpPr>
+        <p:spPr>
+          <a:xfrm>
+            <a:off x="2743200" y="2011680"/>
+            <a:ext cx="2011680" cy="457200"/>
+          </a:xfrm>
+          <a:prstGeom prst="rect">
+            <a:avLst/>
+          </a:prstGeom>
+          <a:noFill/>
+        </p:spPr>
+        <p:txBody>
+          <a:bodyPr wrap="square">
+            <a:spAutoFit/>
+          </a:bodyPr>
+          <a:lstStyle/>
+          <a:p>
+            <a:pPr algn="ctr">
+              <a:defRPr sz="1600" b="1">
+                <a:solidFill>
+                  <a:srgbClr val="FFFFFF"/>
+                </a:solidFill>
+                <a:latin typeface="Calibri"/>
+              </a:defRPr>
+            </a:pPr>
+            <a:r>
+              <a:t>Level Designer</a:t>
+            </a:r>
+          </a:p>
+        </p:txBody>
+      </p:sp>
+      <p:sp>
+        <p:nvSpPr>
+          <p:cNvPr id="13" name="Rounded Rectangle 12"/>
+          <p:cNvSpPr/>
+          <p:nvPr/>
+        </p:nvSpPr>
+        <p:spPr>
+          <a:xfrm>
+            <a:off x="3017520" y="2514600"/>
+            <a:ext cx="1463040" cy="320040"/>
           </a:xfrm>
           <a:prstGeom prst="roundRect">
             <a:avLst/>
@@ -4665,11 +4917,11 @@
           </a:fontRef>
         </p:style>
         <p:txBody>
-          <a:bodyPr wrap="square" rtlCol="0" anchor="ctr"/>
+          <a:bodyPr rtlCol="0" anchor="ctr"/>
           <a:lstStyle/>
           <a:p>
             <a:pPr algn="ctr">
-              <a:defRPr sz="1400" b="1">
+              <a:defRPr sz="1000">
                 <a:solidFill>
                   <a:srgbClr val="FFFFFF"/>
                 </a:solidFill>
@@ -4677,25 +4929,214 @@
               </a:defRPr>
             </a:pPr>
             <a:r>
-              <a:t>Level</a:t>
+              <a:t>Design Layer</a:t>
+            </a:r>
+          </a:p>
+        </p:txBody>
+      </p:sp>
+      <p:sp>
+        <p:nvSpPr>
+          <p:cNvPr id="14" name="TextBox 13"/>
+          <p:cNvSpPr txBox="1"/>
+          <p:nvPr/>
+        </p:nvSpPr>
+        <p:spPr>
+          <a:xfrm>
+            <a:off x="2834640" y="3017520"/>
+            <a:ext cx="1828800" cy="365760"/>
+          </a:xfrm>
+          <a:prstGeom prst="rect">
+            <a:avLst/>
+          </a:prstGeom>
+          <a:noFill/>
+        </p:spPr>
+        <p:txBody>
+          <a:bodyPr wrap="square">
+            <a:spAutoFit/>
+          </a:bodyPr>
+          <a:lstStyle/>
+          <a:p>
+            <a:pPr algn="ctr">
+              <a:defRPr sz="1200" b="1">
+                <a:solidFill>
+                  <a:srgbClr val="00D2FF"/>
+                </a:solidFill>
+                <a:latin typeface="Calibri"/>
+              </a:defRPr>
+            </a:pPr>
+            <a:r>
+              <a:t>LLM (temp 0.7)</a:t>
+            </a:r>
+          </a:p>
+        </p:txBody>
+      </p:sp>
+      <p:sp>
+        <p:nvSpPr>
+          <p:cNvPr id="15" name="TextBox 14"/>
+          <p:cNvSpPr txBox="1"/>
+          <p:nvPr/>
+        </p:nvSpPr>
+        <p:spPr>
+          <a:xfrm>
+            <a:off x="2834640" y="3383280"/>
+            <a:ext cx="1828800" cy="2286000"/>
+          </a:xfrm>
+          <a:prstGeom prst="rect">
+            <a:avLst/>
+          </a:prstGeom>
+          <a:noFill/>
+        </p:spPr>
+        <p:txBody>
+          <a:bodyPr wrap="square">
+            <a:spAutoFit/>
+          </a:bodyPr>
+          <a:lstStyle/>
+          <a:p>
+            <a:pPr algn="ctr">
+              <a:defRPr sz="1300" b="0">
+                <a:solidFill>
+                  <a:srgbClr val="BBBBCC"/>
+                </a:solidFill>
+                <a:latin typeface="Calibri"/>
+              </a:defRPr>
+            </a:pPr>
+            <a:r>
+              <a:t>Creates grid layouts</a:t>
             </a:r>
             <a:br/>
             <a:r>
-              <a:t>Designer</a:t>
-            </a:r>
-          </a:p>
-        </p:txBody>
-      </p:sp>
-      <p:sp>
-        <p:nvSpPr>
-          <p:cNvPr id="7" name="Rounded Rectangle 6"/>
+              <a:t>Slide-specific guidance</a:t>
+            </a:r>
+          </a:p>
+        </p:txBody>
+      </p:sp>
+      <p:sp>
+        <p:nvSpPr>
+          <p:cNvPr id="16" name="Rounded Rectangle 15"/>
           <p:cNvSpPr/>
           <p:nvPr/>
         </p:nvSpPr>
         <p:spPr>
           <a:xfrm>
-            <a:off x="6309360" y="1828800"/>
-            <a:ext cx="1645920" cy="822960"/>
+            <a:off x="5029200" y="1371600"/>
+            <a:ext cx="2011680" cy="4572000"/>
+          </a:xfrm>
+          <a:prstGeom prst="roundRect">
+            <a:avLst/>
+          </a:prstGeom>
+          <a:solidFill>
+            <a:srgbClr val="16213E"/>
+          </a:solidFill>
+          <a:ln>
+            <a:noFill/>
+          </a:ln>
+          <a:effectLst/>
+        </p:spPr>
+        <p:style>
+          <a:lnRef idx="1">
+            <a:schemeClr val="accent1"/>
+          </a:lnRef>
+          <a:fillRef idx="3">
+            <a:schemeClr val="accent1"/>
+          </a:fillRef>
+          <a:effectRef idx="2">
+            <a:schemeClr val="accent1"/>
+          </a:effectRef>
+          <a:fontRef idx="minor">
+            <a:schemeClr val="lt1"/>
+          </a:fontRef>
+        </p:style>
+        <p:txBody>
+          <a:bodyPr rtlCol="0" anchor="ctr"/>
+          <a:lstStyle/>
+          <a:p>
+            <a:pPr algn="ctr"/>
+            <a:endParaRPr/>
+          </a:p>
+        </p:txBody>
+      </p:sp>
+      <p:sp>
+        <p:nvSpPr>
+          <p:cNvPr id="17" name="TextBox 16"/>
+          <p:cNvSpPr txBox="1"/>
+          <p:nvPr/>
+        </p:nvSpPr>
+        <p:spPr>
+          <a:xfrm>
+            <a:off x="5029200" y="1463040"/>
+            <a:ext cx="2011680" cy="640080"/>
+          </a:xfrm>
+          <a:prstGeom prst="rect">
+            <a:avLst/>
+          </a:prstGeom>
+          <a:noFill/>
+        </p:spPr>
+        <p:txBody>
+          <a:bodyPr wrap="square">
+            <a:spAutoFit/>
+          </a:bodyPr>
+          <a:lstStyle/>
+          <a:p>
+            <a:pPr algn="ctr">
+              <a:defRPr sz="3200" b="0">
+                <a:solidFill>
+                  <a:srgbClr val="FFFFFF"/>
+                </a:solidFill>
+                <a:latin typeface="Calibri"/>
+              </a:defRPr>
+            </a:pPr>
+            <a:r>
+              <a:t>⚙️</a:t>
+            </a:r>
+          </a:p>
+        </p:txBody>
+      </p:sp>
+      <p:sp>
+        <p:nvSpPr>
+          <p:cNvPr id="18" name="TextBox 17"/>
+          <p:cNvSpPr txBox="1"/>
+          <p:nvPr/>
+        </p:nvSpPr>
+        <p:spPr>
+          <a:xfrm>
+            <a:off x="5029200" y="2011680"/>
+            <a:ext cx="2011680" cy="457200"/>
+          </a:xfrm>
+          <a:prstGeom prst="rect">
+            <a:avLst/>
+          </a:prstGeom>
+          <a:noFill/>
+        </p:spPr>
+        <p:txBody>
+          <a:bodyPr wrap="square">
+            <a:spAutoFit/>
+          </a:bodyPr>
+          <a:lstStyle/>
+          <a:p>
+            <a:pPr algn="ctr">
+              <a:defRPr sz="1600" b="1">
+                <a:solidFill>
+                  <a:srgbClr val="FFFFFF"/>
+                </a:solidFill>
+                <a:latin typeface="Calibri"/>
+              </a:defRPr>
+            </a:pPr>
+            <a:r>
+              <a:t>Developer</a:t>
+            </a:r>
+          </a:p>
+        </p:txBody>
+      </p:sp>
+      <p:sp>
+        <p:nvSpPr>
+          <p:cNvPr id="19" name="Rounded Rectangle 18"/>
+          <p:cNvSpPr/>
+          <p:nvPr/>
+        </p:nvSpPr>
+        <p:spPr>
+          <a:xfrm>
+            <a:off x="5303520" y="2514600"/>
+            <a:ext cx="1463040" cy="320040"/>
           </a:xfrm>
           <a:prstGeom prst="roundRect">
             <a:avLst/>
@@ -4723,11 +5164,11 @@
           </a:fontRef>
         </p:style>
         <p:txBody>
-          <a:bodyPr wrap="square" rtlCol="0" anchor="ctr"/>
+          <a:bodyPr rtlCol="0" anchor="ctr"/>
           <a:lstStyle/>
           <a:p>
             <a:pPr algn="ctr">
-              <a:defRPr sz="1400" b="1">
+              <a:defRPr sz="1000">
                 <a:solidFill>
                   <a:srgbClr val="FFFFFF"/>
                 </a:solidFill>
@@ -4735,21 +5176,214 @@
               </a:defRPr>
             </a:pPr>
             <a:r>
-              <a:t>Developer</a:t>
-            </a:r>
-          </a:p>
-        </p:txBody>
-      </p:sp>
-      <p:sp>
-        <p:nvSpPr>
-          <p:cNvPr id="8" name="Rounded Rectangle 7"/>
+              <a:t>Implementation</a:t>
+            </a:r>
+          </a:p>
+        </p:txBody>
+      </p:sp>
+      <p:sp>
+        <p:nvSpPr>
+          <p:cNvPr id="20" name="TextBox 19"/>
+          <p:cNvSpPr txBox="1"/>
+          <p:nvPr/>
+        </p:nvSpPr>
+        <p:spPr>
+          <a:xfrm>
+            <a:off x="5120640" y="3017520"/>
+            <a:ext cx="1828800" cy="365760"/>
+          </a:xfrm>
+          <a:prstGeom prst="rect">
+            <a:avLst/>
+          </a:prstGeom>
+          <a:noFill/>
+        </p:spPr>
+        <p:txBody>
+          <a:bodyPr wrap="square">
+            <a:spAutoFit/>
+          </a:bodyPr>
+          <a:lstStyle/>
+          <a:p>
+            <a:pPr algn="ctr">
+              <a:defRPr sz="1200" b="1">
+                <a:solidFill>
+                  <a:srgbClr val="00D2FF"/>
+                </a:solidFill>
+                <a:latin typeface="Calibri"/>
+              </a:defRPr>
+            </a:pPr>
+            <a:r>
+              <a:t>Deterministic</a:t>
+            </a:r>
+          </a:p>
+        </p:txBody>
+      </p:sp>
+      <p:sp>
+        <p:nvSpPr>
+          <p:cNvPr id="21" name="TextBox 20"/>
+          <p:cNvSpPr txBox="1"/>
+          <p:nvPr/>
+        </p:nvSpPr>
+        <p:spPr>
+          <a:xfrm>
+            <a:off x="5120640" y="3383280"/>
+            <a:ext cx="1828800" cy="2286000"/>
+          </a:xfrm>
+          <a:prstGeom prst="rect">
+            <a:avLst/>
+          </a:prstGeom>
+          <a:noFill/>
+        </p:spPr>
+        <p:txBody>
+          <a:bodyPr wrap="square">
+            <a:spAutoFit/>
+          </a:bodyPr>
+          <a:lstStyle/>
+          <a:p>
+            <a:pPr algn="ctr">
+              <a:defRPr sz="1300" b="0">
+                <a:solidFill>
+                  <a:srgbClr val="BBBBCC"/>
+                </a:solidFill>
+                <a:latin typeface="Calibri"/>
+              </a:defRPr>
+            </a:pPr>
+            <a:r>
+              <a:t>Translates designs to config</a:t>
+            </a:r>
+            <a:br/>
+            <a:r>
+              <a:t>Routes failures (10 criteria)</a:t>
+            </a:r>
+          </a:p>
+        </p:txBody>
+      </p:sp>
+      <p:sp>
+        <p:nvSpPr>
+          <p:cNvPr id="22" name="Rounded Rectangle 21"/>
           <p:cNvSpPr/>
           <p:nvPr/>
         </p:nvSpPr>
         <p:spPr>
           <a:xfrm>
-            <a:off x="8321040" y="1828800"/>
-            <a:ext cx="1645920" cy="822960"/>
+            <a:off x="7315200" y="1371600"/>
+            <a:ext cx="2011680" cy="4572000"/>
+          </a:xfrm>
+          <a:prstGeom prst="roundRect">
+            <a:avLst/>
+          </a:prstGeom>
+          <a:solidFill>
+            <a:srgbClr val="16213E"/>
+          </a:solidFill>
+          <a:ln>
+            <a:noFill/>
+          </a:ln>
+          <a:effectLst/>
+        </p:spPr>
+        <p:style>
+          <a:lnRef idx="1">
+            <a:schemeClr val="accent1"/>
+          </a:lnRef>
+          <a:fillRef idx="3">
+            <a:schemeClr val="accent1"/>
+          </a:fillRef>
+          <a:effectRef idx="2">
+            <a:schemeClr val="accent1"/>
+          </a:effectRef>
+          <a:fontRef idx="minor">
+            <a:schemeClr val="lt1"/>
+          </a:fontRef>
+        </p:style>
+        <p:txBody>
+          <a:bodyPr rtlCol="0" anchor="ctr"/>
+          <a:lstStyle/>
+          <a:p>
+            <a:pPr algn="ctr"/>
+            <a:endParaRPr/>
+          </a:p>
+        </p:txBody>
+      </p:sp>
+      <p:sp>
+        <p:nvSpPr>
+          <p:cNvPr id="23" name="TextBox 22"/>
+          <p:cNvSpPr txBox="1"/>
+          <p:nvPr/>
+        </p:nvSpPr>
+        <p:spPr>
+          <a:xfrm>
+            <a:off x="7315200" y="1463040"/>
+            <a:ext cx="2011680" cy="640080"/>
+          </a:xfrm>
+          <a:prstGeom prst="rect">
+            <a:avLst/>
+          </a:prstGeom>
+          <a:noFill/>
+        </p:spPr>
+        <p:txBody>
+          <a:bodyPr wrap="square">
+            <a:spAutoFit/>
+          </a:bodyPr>
+          <a:lstStyle/>
+          <a:p>
+            <a:pPr algn="ctr">
+              <a:defRPr sz="3200" b="0">
+                <a:solidFill>
+                  <a:srgbClr val="FFFFFF"/>
+                </a:solidFill>
+                <a:latin typeface="Calibri"/>
+              </a:defRPr>
+            </a:pPr>
+            <a:r>
+              <a:t>✅</a:t>
+            </a:r>
+          </a:p>
+        </p:txBody>
+      </p:sp>
+      <p:sp>
+        <p:nvSpPr>
+          <p:cNvPr id="24" name="TextBox 23"/>
+          <p:cNvSpPr txBox="1"/>
+          <p:nvPr/>
+        </p:nvSpPr>
+        <p:spPr>
+          <a:xfrm>
+            <a:off x="7315200" y="2011680"/>
+            <a:ext cx="2011680" cy="457200"/>
+          </a:xfrm>
+          <a:prstGeom prst="rect">
+            <a:avLst/>
+          </a:prstGeom>
+          <a:noFill/>
+        </p:spPr>
+        <p:txBody>
+          <a:bodyPr wrap="square">
+            <a:spAutoFit/>
+          </a:bodyPr>
+          <a:lstStyle/>
+          <a:p>
+            <a:pPr algn="ctr">
+              <a:defRPr sz="1600" b="1">
+                <a:solidFill>
+                  <a:srgbClr val="FFFFFF"/>
+                </a:solidFill>
+                <a:latin typeface="Calibri"/>
+              </a:defRPr>
+            </a:pPr>
+            <a:r>
+              <a:t>QA Tester</a:t>
+            </a:r>
+          </a:p>
+        </p:txBody>
+      </p:sp>
+      <p:sp>
+        <p:nvSpPr>
+          <p:cNvPr id="25" name="Rounded Rectangle 24"/>
+          <p:cNvSpPr/>
+          <p:nvPr/>
+        </p:nvSpPr>
+        <p:spPr>
+          <a:xfrm>
+            <a:off x="7589520" y="2514600"/>
+            <a:ext cx="1463040" cy="320040"/>
           </a:xfrm>
           <a:prstGeom prst="roundRect">
             <a:avLst/>
@@ -4777,11 +5411,11 @@
           </a:fontRef>
         </p:style>
         <p:txBody>
-          <a:bodyPr wrap="square" rtlCol="0" anchor="ctr"/>
+          <a:bodyPr rtlCol="0" anchor="ctr"/>
           <a:lstStyle/>
           <a:p>
             <a:pPr algn="ctr">
-              <a:defRPr sz="1400" b="1">
+              <a:defRPr sz="1000">
                 <a:solidFill>
                   <a:srgbClr val="FFFFFF"/>
                 </a:solidFill>
@@ -4789,27 +5423,103 @@
               </a:defRPr>
             </a:pPr>
             <a:r>
-              <a:t>QA Tester</a:t>
-            </a:r>
-          </a:p>
-        </p:txBody>
-      </p:sp>
-      <p:sp>
-        <p:nvSpPr>
-          <p:cNvPr id="9" name="Rounded Rectangle 8"/>
+              <a:t>Implementation</a:t>
+            </a:r>
+          </a:p>
+        </p:txBody>
+      </p:sp>
+      <p:sp>
+        <p:nvSpPr>
+          <p:cNvPr id="26" name="TextBox 25"/>
+          <p:cNvSpPr txBox="1"/>
+          <p:nvPr/>
+        </p:nvSpPr>
+        <p:spPr>
+          <a:xfrm>
+            <a:off x="7406640" y="3017520"/>
+            <a:ext cx="1828800" cy="365760"/>
+          </a:xfrm>
+          <a:prstGeom prst="rect">
+            <a:avLst/>
+          </a:prstGeom>
+          <a:noFill/>
+        </p:spPr>
+        <p:txBody>
+          <a:bodyPr wrap="square">
+            <a:spAutoFit/>
+          </a:bodyPr>
+          <a:lstStyle/>
+          <a:p>
+            <a:pPr algn="ctr">
+              <a:defRPr sz="1200" b="1">
+                <a:solidFill>
+                  <a:srgbClr val="00D2FF"/>
+                </a:solidFill>
+                <a:latin typeface="Calibri"/>
+              </a:defRPr>
+            </a:pPr>
+            <a:r>
+              <a:t>BFS Solver</a:t>
+            </a:r>
+          </a:p>
+        </p:txBody>
+      </p:sp>
+      <p:sp>
+        <p:nvSpPr>
+          <p:cNvPr id="27" name="TextBox 26"/>
+          <p:cNvSpPr txBox="1"/>
+          <p:nvPr/>
+        </p:nvSpPr>
+        <p:spPr>
+          <a:xfrm>
+            <a:off x="7406640" y="3383280"/>
+            <a:ext cx="1828800" cy="2286000"/>
+          </a:xfrm>
+          <a:prstGeom prst="rect">
+            <a:avLst/>
+          </a:prstGeom>
+          <a:noFill/>
+        </p:spPr>
+        <p:txBody>
+          <a:bodyPr wrap="square">
+            <a:spAutoFit/>
+          </a:bodyPr>
+          <a:lstStyle/>
+          <a:p>
+            <a:pPr algn="ctr">
+              <a:defRPr sz="1300" b="0">
+                <a:solidFill>
+                  <a:srgbClr val="BBBBCC"/>
+                </a:solidFill>
+                <a:latin typeface="Calibri"/>
+              </a:defRPr>
+            </a:pPr>
+            <a:r>
+              <a:t>Verifies solvability</a:t>
+            </a:r>
+            <a:br/>
+            <a:r>
+              <a:t>Difficulty &amp; diversity checks</a:t>
+            </a:r>
+          </a:p>
+        </p:txBody>
+      </p:sp>
+      <p:sp>
+        <p:nvSpPr>
+          <p:cNvPr id="28" name="Rounded Rectangle 27"/>
           <p:cNvSpPr/>
           <p:nvPr/>
         </p:nvSpPr>
         <p:spPr>
           <a:xfrm>
-            <a:off x="10332720" y="1828800"/>
-            <a:ext cx="1645920" cy="822960"/>
+            <a:off x="9601200" y="1371600"/>
+            <a:ext cx="2011680" cy="4572000"/>
           </a:xfrm>
           <a:prstGeom prst="roundRect">
             <a:avLst/>
           </a:prstGeom>
           <a:solidFill>
-            <a:srgbClr val="2ECC71"/>
+            <a:srgbClr val="16213E"/>
           </a:solidFill>
           <a:ln>
             <a:noFill/>
@@ -4831,59 +5541,6 @@
           </a:fontRef>
         </p:style>
         <p:txBody>
-          <a:bodyPr wrap="square" rtlCol="0" anchor="ctr"/>
-          <a:lstStyle/>
-          <a:p>
-            <a:pPr algn="ctr">
-              <a:defRPr sz="1400" b="1">
-                <a:solidFill>
-                  <a:srgbClr val="FFFFFF"/>
-                </a:solidFill>
-                <a:latin typeface="Calibri"/>
-              </a:defRPr>
-            </a:pPr>
-            <a:r>
-              <a:t>Finalize</a:t>
-            </a:r>
-          </a:p>
-        </p:txBody>
-      </p:sp>
-      <p:sp>
-        <p:nvSpPr>
-          <p:cNvPr id="10" name="Right Arrow 9"/>
-          <p:cNvSpPr/>
-          <p:nvPr/>
-        </p:nvSpPr>
-        <p:spPr>
-          <a:xfrm>
-            <a:off x="1965960" y="2103120"/>
-            <a:ext cx="274320" cy="274320"/>
-          </a:xfrm>
-          <a:prstGeom prst="rightArrow">
-            <a:avLst/>
-          </a:prstGeom>
-          <a:solidFill>
-            <a:srgbClr val="00D2FF"/>
-          </a:solidFill>
-          <a:ln>
-            <a:noFill/>
-          </a:ln>
-        </p:spPr>
-        <p:style>
-          <a:lnRef idx="1">
-            <a:schemeClr val="accent1"/>
-          </a:lnRef>
-          <a:fillRef idx="3">
-            <a:schemeClr val="accent1"/>
-          </a:fillRef>
-          <a:effectRef idx="2">
-            <a:schemeClr val="accent1"/>
-          </a:effectRef>
-          <a:fontRef idx="minor">
-            <a:schemeClr val="lt1"/>
-          </a:fontRef>
-        </p:style>
-        <p:txBody>
           <a:bodyPr rtlCol="0" anchor="ctr"/>
           <a:lstStyle/>
           <a:p>
@@ -4894,235 +5551,14 @@
       </p:sp>
       <p:sp>
         <p:nvSpPr>
-          <p:cNvPr id="11" name="Right Arrow 10"/>
-          <p:cNvSpPr/>
-          <p:nvPr/>
-        </p:nvSpPr>
-        <p:spPr>
-          <a:xfrm>
-            <a:off x="3977640" y="2103120"/>
-            <a:ext cx="274320" cy="274320"/>
-          </a:xfrm>
-          <a:prstGeom prst="rightArrow">
-            <a:avLst/>
-          </a:prstGeom>
-          <a:solidFill>
-            <a:srgbClr val="00D2FF"/>
-          </a:solidFill>
-          <a:ln>
-            <a:noFill/>
-          </a:ln>
-        </p:spPr>
-        <p:style>
-          <a:lnRef idx="1">
-            <a:schemeClr val="accent1"/>
-          </a:lnRef>
-          <a:fillRef idx="3">
-            <a:schemeClr val="accent1"/>
-          </a:fillRef>
-          <a:effectRef idx="2">
-            <a:schemeClr val="accent1"/>
-          </a:effectRef>
-          <a:fontRef idx="minor">
-            <a:schemeClr val="lt1"/>
-          </a:fontRef>
-        </p:style>
-        <p:txBody>
-          <a:bodyPr rtlCol="0" anchor="ctr"/>
-          <a:lstStyle/>
-          <a:p>
-            <a:pPr algn="ctr"/>
-            <a:endParaRPr/>
-          </a:p>
-        </p:txBody>
-      </p:sp>
-      <p:sp>
-        <p:nvSpPr>
-          <p:cNvPr id="12" name="Right Arrow 11"/>
-          <p:cNvSpPr/>
-          <p:nvPr/>
-        </p:nvSpPr>
-        <p:spPr>
-          <a:xfrm>
-            <a:off x="5989320" y="2103120"/>
-            <a:ext cx="274320" cy="274320"/>
-          </a:xfrm>
-          <a:prstGeom prst="rightArrow">
-            <a:avLst/>
-          </a:prstGeom>
-          <a:solidFill>
-            <a:srgbClr val="00D2FF"/>
-          </a:solidFill>
-          <a:ln>
-            <a:noFill/>
-          </a:ln>
-        </p:spPr>
-        <p:style>
-          <a:lnRef idx="1">
-            <a:schemeClr val="accent1"/>
-          </a:lnRef>
-          <a:fillRef idx="3">
-            <a:schemeClr val="accent1"/>
-          </a:fillRef>
-          <a:effectRef idx="2">
-            <a:schemeClr val="accent1"/>
-          </a:effectRef>
-          <a:fontRef idx="minor">
-            <a:schemeClr val="lt1"/>
-          </a:fontRef>
-        </p:style>
-        <p:txBody>
-          <a:bodyPr rtlCol="0" anchor="ctr"/>
-          <a:lstStyle/>
-          <a:p>
-            <a:pPr algn="ctr"/>
-            <a:endParaRPr/>
-          </a:p>
-        </p:txBody>
-      </p:sp>
-      <p:sp>
-        <p:nvSpPr>
-          <p:cNvPr id="13" name="Right Arrow 12"/>
-          <p:cNvSpPr/>
-          <p:nvPr/>
-        </p:nvSpPr>
-        <p:spPr>
-          <a:xfrm>
-            <a:off x="8001000" y="2103120"/>
-            <a:ext cx="274320" cy="274320"/>
-          </a:xfrm>
-          <a:prstGeom prst="rightArrow">
-            <a:avLst/>
-          </a:prstGeom>
-          <a:solidFill>
-            <a:srgbClr val="00D2FF"/>
-          </a:solidFill>
-          <a:ln>
-            <a:noFill/>
-          </a:ln>
-        </p:spPr>
-        <p:style>
-          <a:lnRef idx="1">
-            <a:schemeClr val="accent1"/>
-          </a:lnRef>
-          <a:fillRef idx="3">
-            <a:schemeClr val="accent1"/>
-          </a:fillRef>
-          <a:effectRef idx="2">
-            <a:schemeClr val="accent1"/>
-          </a:effectRef>
-          <a:fontRef idx="minor">
-            <a:schemeClr val="lt1"/>
-          </a:fontRef>
-        </p:style>
-        <p:txBody>
-          <a:bodyPr rtlCol="0" anchor="ctr"/>
-          <a:lstStyle/>
-          <a:p>
-            <a:pPr algn="ctr"/>
-            <a:endParaRPr/>
-          </a:p>
-        </p:txBody>
-      </p:sp>
-      <p:sp>
-        <p:nvSpPr>
-          <p:cNvPr id="14" name="Right Arrow 13"/>
-          <p:cNvSpPr/>
-          <p:nvPr/>
-        </p:nvSpPr>
-        <p:spPr>
-          <a:xfrm>
-            <a:off x="10012680" y="2103120"/>
-            <a:ext cx="274320" cy="274320"/>
-          </a:xfrm>
-          <a:prstGeom prst="rightArrow">
-            <a:avLst/>
-          </a:prstGeom>
-          <a:solidFill>
-            <a:srgbClr val="00D2FF"/>
-          </a:solidFill>
-          <a:ln>
-            <a:noFill/>
-          </a:ln>
-        </p:spPr>
-        <p:style>
-          <a:lnRef idx="1">
-            <a:schemeClr val="accent1"/>
-          </a:lnRef>
-          <a:fillRef idx="3">
-            <a:schemeClr val="accent1"/>
-          </a:fillRef>
-          <a:effectRef idx="2">
-            <a:schemeClr val="accent1"/>
-          </a:effectRef>
-          <a:fontRef idx="minor">
-            <a:schemeClr val="lt1"/>
-          </a:fontRef>
-        </p:style>
-        <p:txBody>
-          <a:bodyPr rtlCol="0" anchor="ctr"/>
-          <a:lstStyle/>
-          <a:p>
-            <a:pPr algn="ctr"/>
-            <a:endParaRPr/>
-          </a:p>
-        </p:txBody>
-      </p:sp>
-      <p:sp>
-        <p:nvSpPr>
-          <p:cNvPr id="15" name="Rounded Rectangle 14"/>
-          <p:cNvSpPr/>
-          <p:nvPr/>
-        </p:nvSpPr>
-        <p:spPr>
-          <a:xfrm>
-            <a:off x="6309360" y="3200400"/>
-            <a:ext cx="5669280" cy="2926080"/>
-          </a:xfrm>
-          <a:prstGeom prst="roundRect">
-            <a:avLst/>
-          </a:prstGeom>
-          <a:solidFill>
-            <a:srgbClr val="1E1E38"/>
-          </a:solidFill>
-          <a:ln>
-            <a:noFill/>
-          </a:ln>
-          <a:effectLst/>
-        </p:spPr>
-        <p:style>
-          <a:lnRef idx="1">
-            <a:schemeClr val="accent1"/>
-          </a:lnRef>
-          <a:fillRef idx="3">
-            <a:schemeClr val="accent1"/>
-          </a:fillRef>
-          <a:effectRef idx="2">
-            <a:schemeClr val="accent1"/>
-          </a:effectRef>
-          <a:fontRef idx="minor">
-            <a:schemeClr val="lt1"/>
-          </a:fontRef>
-        </p:style>
-        <p:txBody>
-          <a:bodyPr rtlCol="0" anchor="ctr"/>
-          <a:lstStyle/>
-          <a:p>
-            <a:pPr algn="ctr"/>
-            <a:endParaRPr/>
-          </a:p>
-        </p:txBody>
-      </p:sp>
-      <p:sp>
-        <p:nvSpPr>
-          <p:cNvPr id="16" name="TextBox 15"/>
+          <p:cNvPr id="29" name="TextBox 28"/>
           <p:cNvSpPr txBox="1"/>
           <p:nvPr/>
         </p:nvSpPr>
         <p:spPr>
           <a:xfrm>
-            <a:off x="6492240" y="3291840"/>
-            <a:ext cx="2743200" cy="365760"/>
+            <a:off x="9601200" y="1463040"/>
+            <a:ext cx="2011680" cy="640080"/>
           </a:xfrm>
           <a:prstGeom prst="rect">
             <a:avLst/>
@@ -5135,30 +5571,66 @@
           </a:bodyPr>
           <a:lstStyle/>
           <a:p>
-            <a:pPr algn="l">
+            <a:pPr algn="ctr">
+              <a:defRPr sz="3200" b="0">
+                <a:solidFill>
+                  <a:srgbClr val="FFFFFF"/>
+                </a:solidFill>
+                <a:latin typeface="Calibri"/>
+              </a:defRPr>
+            </a:pPr>
+            <a:r>
+              <a:t>🐛</a:t>
+            </a:r>
+          </a:p>
+        </p:txBody>
+      </p:sp>
+      <p:sp>
+        <p:nvSpPr>
+          <p:cNvPr id="30" name="TextBox 29"/>
+          <p:cNvSpPr txBox="1"/>
+          <p:nvPr/>
+        </p:nvSpPr>
+        <p:spPr>
+          <a:xfrm>
+            <a:off x="9601200" y="2011680"/>
+            <a:ext cx="2011680" cy="457200"/>
+          </a:xfrm>
+          <a:prstGeom prst="rect">
+            <a:avLst/>
+          </a:prstGeom>
+          <a:noFill/>
+        </p:spPr>
+        <p:txBody>
+          <a:bodyPr wrap="square">
+            <a:spAutoFit/>
+          </a:bodyPr>
+          <a:lstStyle/>
+          <a:p>
+            <a:pPr algn="ctr">
               <a:defRPr sz="1600" b="1">
                 <a:solidFill>
-                  <a:srgbClr val="E94560"/>
-                </a:solidFill>
-                <a:latin typeface="Calibri"/>
-              </a:defRPr>
-            </a:pPr>
-            <a:r>
-              <a:t>Debug Feedback Loop</a:t>
-            </a:r>
-          </a:p>
-        </p:txBody>
-      </p:sp>
-      <p:sp>
-        <p:nvSpPr>
-          <p:cNvPr id="17" name="Rounded Rectangle 16"/>
+                  <a:srgbClr val="FFFFFF"/>
+                </a:solidFill>
+                <a:latin typeface="Calibri"/>
+              </a:defRPr>
+            </a:pPr>
+            <a:r>
+              <a:t>Debugger</a:t>
+            </a:r>
+          </a:p>
+        </p:txBody>
+      </p:sp>
+      <p:sp>
+        <p:nvSpPr>
+          <p:cNvPr id="31" name="Rounded Rectangle 30"/>
           <p:cNvSpPr/>
           <p:nvPr/>
         </p:nvSpPr>
         <p:spPr>
           <a:xfrm>
-            <a:off x="6583680" y="3840480"/>
-            <a:ext cx="2560320" cy="640080"/>
+            <a:off x="9875520" y="2514600"/>
+            <a:ext cx="1463040" cy="320040"/>
           </a:xfrm>
           <a:prstGeom prst="roundRect">
             <a:avLst/>
@@ -5190,7 +5662,7 @@
           <a:lstStyle/>
           <a:p>
             <a:pPr algn="ctr">
-              <a:defRPr sz="1300" b="1">
+              <a:defRPr sz="1000">
                 <a:solidFill>
                   <a:srgbClr val="FFFFFF"/>
                 </a:solidFill>
@@ -5198,21 +5670,21 @@
               </a:defRPr>
             </a:pPr>
             <a:r>
-              <a:t>Debugger</a:t>
-            </a:r>
-          </a:p>
-        </p:txBody>
-      </p:sp>
-      <p:sp>
-        <p:nvSpPr>
-          <p:cNvPr id="18" name="TextBox 17"/>
+              <a:t>Implementation</a:t>
+            </a:r>
+          </a:p>
+        </p:txBody>
+      </p:sp>
+      <p:sp>
+        <p:nvSpPr>
+          <p:cNvPr id="32" name="TextBox 31"/>
           <p:cNvSpPr txBox="1"/>
           <p:nvPr/>
         </p:nvSpPr>
         <p:spPr>
           <a:xfrm>
-            <a:off x="6583680" y="4572000"/>
-            <a:ext cx="2560320" cy="731520"/>
+            <a:off x="9692640" y="3017520"/>
+            <a:ext cx="1828800" cy="365760"/>
           </a:xfrm>
           <a:prstGeom prst="rect">
             <a:avLst/>
@@ -5226,87 +5698,29 @@
           <a:lstStyle/>
           <a:p>
             <a:pPr algn="ctr">
-              <a:defRPr sz="1200" b="0">
-                <a:solidFill>
-                  <a:srgbClr val="BBBBCC"/>
-                </a:solidFill>
-                <a:latin typeface="Calibri"/>
-              </a:defRPr>
-            </a:pPr>
-            <a:r>
-              <a:t>Config bugs (C1-C5)</a:t>
-            </a:r>
-            <a:br/>
-            <a:r>
-              <a:t>LLM temp 0.3, minimal fixes</a:t>
-            </a:r>
-          </a:p>
-        </p:txBody>
-      </p:sp>
-      <p:sp>
-        <p:nvSpPr>
-          <p:cNvPr id="19" name="Rounded Rectangle 18"/>
-          <p:cNvSpPr/>
-          <p:nvPr/>
-        </p:nvSpPr>
-        <p:spPr>
-          <a:xfrm>
-            <a:off x="9418320" y="3840480"/>
-            <a:ext cx="2560320" cy="640080"/>
-          </a:xfrm>
-          <a:prstGeom prst="roundRect">
-            <a:avLst/>
-          </a:prstGeom>
-          <a:solidFill>
-            <a:srgbClr val="2E86AB"/>
-          </a:solidFill>
-          <a:ln>
-            <a:noFill/>
-          </a:ln>
-          <a:effectLst/>
-        </p:spPr>
-        <p:style>
-          <a:lnRef idx="1">
-            <a:schemeClr val="accent1"/>
-          </a:lnRef>
-          <a:fillRef idx="3">
-            <a:schemeClr val="accent1"/>
-          </a:fillRef>
-          <a:effectRef idx="2">
-            <a:schemeClr val="accent1"/>
-          </a:effectRef>
-          <a:fontRef idx="minor">
-            <a:schemeClr val="lt1"/>
-          </a:fontRef>
-        </p:style>
-        <p:txBody>
-          <a:bodyPr rtlCol="0" anchor="ctr"/>
-          <a:lstStyle/>
-          <a:p>
-            <a:pPr algn="ctr">
-              <a:defRPr sz="1300" b="1">
-                <a:solidFill>
-                  <a:srgbClr val="FFFFFF"/>
-                </a:solidFill>
-                <a:latin typeface="Calibri"/>
-              </a:defRPr>
-            </a:pPr>
-            <a:r>
-              <a:t>Level Designer</a:t>
-            </a:r>
-          </a:p>
-        </p:txBody>
-      </p:sp>
-      <p:sp>
-        <p:nvSpPr>
-          <p:cNvPr id="20" name="TextBox 19"/>
+              <a:defRPr sz="1200" b="1">
+                <a:solidFill>
+                  <a:srgbClr val="00D2FF"/>
+                </a:solidFill>
+                <a:latin typeface="Calibri"/>
+              </a:defRPr>
+            </a:pPr>
+            <a:r>
+              <a:t>LLM (temp 0.3)</a:t>
+            </a:r>
+          </a:p>
+        </p:txBody>
+      </p:sp>
+      <p:sp>
+        <p:nvSpPr>
+          <p:cNvPr id="33" name="TextBox 32"/>
           <p:cNvSpPr txBox="1"/>
           <p:nvPr/>
         </p:nvSpPr>
         <p:spPr>
           <a:xfrm>
-            <a:off x="9418320" y="4572000"/>
-            <a:ext cx="2560320" cy="731520"/>
+            <a:off x="9692640" y="3383280"/>
+            <a:ext cx="1828800" cy="2286000"/>
           </a:xfrm>
           <a:prstGeom prst="rect">
             <a:avLst/>
@@ -5320,7 +5734,7 @@
           <a:lstStyle/>
           <a:p>
             <a:pPr algn="ctr">
-              <a:defRPr sz="1200" b="0">
+              <a:defRPr sz="1300" b="0">
                 <a:solidFill>
                   <a:srgbClr val="BBBBCC"/>
                 </a:solidFill>
@@ -5328,217 +5742,11 @@
               </a:defRPr>
             </a:pPr>
             <a:r>
-              <a:t>Design flaws (D1-D5)</a:t>
+              <a:t>Minimal config fixes</a:t>
             </a:r>
             <a:br/>
             <a:r>
-              <a:t>Redesign with solver feedback</a:t>
-            </a:r>
-          </a:p>
-        </p:txBody>
-      </p:sp>
-      <p:sp>
-        <p:nvSpPr>
-          <p:cNvPr id="21" name="Rounded Rectangle 20"/>
-          <p:cNvSpPr/>
-          <p:nvPr/>
-        </p:nvSpPr>
-        <p:spPr>
-          <a:xfrm>
-            <a:off x="274320" y="3200400"/>
-            <a:ext cx="5669280" cy="2926080"/>
-          </a:xfrm>
-          <a:prstGeom prst="roundRect">
-            <a:avLst/>
-          </a:prstGeom>
-          <a:solidFill>
-            <a:srgbClr val="1E1E38"/>
-          </a:solidFill>
-          <a:ln>
-            <a:noFill/>
-          </a:ln>
-          <a:effectLst/>
-        </p:spPr>
-        <p:style>
-          <a:lnRef idx="1">
-            <a:schemeClr val="accent1"/>
-          </a:lnRef>
-          <a:fillRef idx="3">
-            <a:schemeClr val="accent1"/>
-          </a:fillRef>
-          <a:effectRef idx="2">
-            <a:schemeClr val="accent1"/>
-          </a:effectRef>
-          <a:fontRef idx="minor">
-            <a:schemeClr val="lt1"/>
-          </a:fontRef>
-        </p:style>
-        <p:txBody>
-          <a:bodyPr rtlCol="0" anchor="ctr"/>
-          <a:lstStyle/>
-          <a:p>
-            <a:pPr algn="ctr"/>
-            <a:endParaRPr/>
-          </a:p>
-        </p:txBody>
-      </p:sp>
-      <p:sp>
-        <p:nvSpPr>
-          <p:cNvPr id="22" name="TextBox 21"/>
-          <p:cNvSpPr txBox="1"/>
-          <p:nvPr/>
-        </p:nvSpPr>
-        <p:spPr>
-          <a:xfrm>
-            <a:off x="457200" y="3291840"/>
-            <a:ext cx="2743200" cy="365760"/>
-          </a:xfrm>
-          <a:prstGeom prst="rect">
-            <a:avLst/>
-          </a:prstGeom>
-          <a:noFill/>
-        </p:spPr>
-        <p:txBody>
-          <a:bodyPr wrap="square">
-            <a:spAutoFit/>
-          </a:bodyPr>
-          <a:lstStyle/>
-          <a:p>
-            <a:pPr algn="l">
-              <a:defRPr sz="1600" b="1">
-                <a:solidFill>
-                  <a:srgbClr val="00D2FF"/>
-                </a:solidFill>
-                <a:latin typeface="Calibri"/>
-              </a:defRPr>
-            </a:pPr>
-            <a:r>
-              <a:t>Key Design Principle</a:t>
-            </a:r>
-          </a:p>
-        </p:txBody>
-      </p:sp>
-      <p:sp>
-        <p:nvSpPr>
-          <p:cNvPr id="23" name="TextBox 22"/>
-          <p:cNvSpPr txBox="1"/>
-          <p:nvPr/>
-        </p:nvSpPr>
-        <p:spPr>
-          <a:xfrm>
-            <a:off x="457200" y="3749039"/>
-            <a:ext cx="5303520" cy="2286000"/>
-          </a:xfrm>
-          <a:prstGeom prst="rect">
-            <a:avLst/>
-          </a:prstGeom>
-          <a:noFill/>
-        </p:spPr>
-        <p:txBody>
-          <a:bodyPr wrap="square">
-            <a:spAutoFit/>
-          </a:bodyPr>
-          <a:lstStyle/>
-          <a:p>
-            <a:pPr>
-              <a:spcAft>
-                <a:spcPts val="600"/>
-              </a:spcAft>
-            </a:pPr>
-            <a:r>
-              <a:rPr sz="1400">
-                <a:solidFill>
-                  <a:srgbClr val="00D2FF"/>
-                </a:solidFill>
-                <a:latin typeface="Calibri"/>
-              </a:rPr>
-              <a:t>   ▸  </a:t>
-            </a:r>
-            <a:r>
-              <a:rPr sz="1400">
-                <a:solidFill>
-                  <a:srgbClr val="FFFFFF"/>
-                </a:solidFill>
-                <a:latin typeface="Calibri"/>
-              </a:rPr>
-              <a:t>Deterministic where possible,
-LLM where necessary</a:t>
-            </a:r>
-          </a:p>
-          <a:p>
-            <a:pPr>
-              <a:spcAft>
-                <a:spcPts val="600"/>
-              </a:spcAft>
-            </a:pPr>
-            <a:r>
-              <a:rPr sz="1400">
-                <a:solidFill>
-                  <a:srgbClr val="00D2FF"/>
-                </a:solidFill>
-                <a:latin typeface="Calibri"/>
-              </a:rPr>
-              <a:t>   ▸  </a:t>
-            </a:r>
-            <a:r>
-              <a:rPr sz="1400">
-                <a:solidFill>
-                  <a:srgbClr val="FFFFFF"/>
-                </a:solidFill>
-                <a:latin typeface="Calibri"/>
-              </a:rPr>
-              <a:t>Solvability verified by BFS solver,
-not LLM judgment</a:t>
-            </a:r>
-          </a:p>
-          <a:p>
-            <a:pPr>
-              <a:spcAft>
-                <a:spcPts val="600"/>
-              </a:spcAft>
-            </a:pPr>
-            <a:r>
-              <a:rPr sz="1400">
-                <a:solidFill>
-                  <a:srgbClr val="00D2FF"/>
-                </a:solidFill>
-                <a:latin typeface="Calibri"/>
-              </a:rPr>
-              <a:t>   ▸  </a:t>
-            </a:r>
-            <a:r>
-              <a:rPr sz="1400">
-                <a:solidFill>
-                  <a:srgbClr val="FFFFFF"/>
-                </a:solidFill>
-                <a:latin typeface="Calibri"/>
-              </a:rPr>
-              <a:t>10 routing criteria -- all code, no LLM</a:t>
-            </a:r>
-          </a:p>
-          <a:p>
-            <a:pPr>
-              <a:spcAft>
-                <a:spcPts val="600"/>
-              </a:spcAft>
-            </a:pPr>
-            <a:r>
-              <a:rPr sz="1400">
-                <a:solidFill>
-                  <a:srgbClr val="00D2FF"/>
-                </a:solidFill>
-                <a:latin typeface="Calibri"/>
-              </a:rPr>
-              <a:t>   ▸  </a:t>
-            </a:r>
-            <a:r>
-              <a:rPr sz="1400">
-                <a:solidFill>
-                  <a:srgbClr val="FFFFFF"/>
-                </a:solidFill>
-                <a:latin typeface="Calibri"/>
-              </a:rPr>
-              <a:t>Max 3 debug cycles, 80K token budget</a:t>
+              <a:t>25% tile change threshold</a:t>
             </a:r>
           </a:p>
         </p:txBody>
@@ -5607,7 +5815,7 @@
               </a:defRPr>
             </a:pPr>
             <a:r>
-              <a:t>Five Coordinated Agents</a:t>
+              <a:t>Architecture</a:t>
             </a:r>
           </a:p>
         </p:txBody>
@@ -5664,14 +5872,14 @@
         </p:nvSpPr>
         <p:spPr>
           <a:xfrm>
-            <a:off x="457200" y="1371600"/>
-            <a:ext cx="2011680" cy="4572000"/>
+            <a:off x="274320" y="1828800"/>
+            <a:ext cx="1645920" cy="822960"/>
           </a:xfrm>
           <a:prstGeom prst="roundRect">
             <a:avLst/>
           </a:prstGeom>
           <a:solidFill>
-            <a:srgbClr val="16213E"/>
+            <a:srgbClr val="8888AA"/>
           </a:solidFill>
           <a:ln>
             <a:noFill/>
@@ -5693,38 +5901,11 @@
           </a:fontRef>
         </p:style>
         <p:txBody>
-          <a:bodyPr rtlCol="0" anchor="ctr"/>
-          <a:lstStyle/>
-          <a:p>
-            <a:pPr algn="ctr"/>
-            <a:endParaRPr/>
-          </a:p>
-        </p:txBody>
-      </p:sp>
-      <p:sp>
-        <p:nvSpPr>
-          <p:cNvPr id="5" name="TextBox 4"/>
-          <p:cNvSpPr txBox="1"/>
-          <p:nvPr/>
-        </p:nvSpPr>
-        <p:spPr>
-          <a:xfrm>
-            <a:off x="457200" y="1463040"/>
-            <a:ext cx="2011680" cy="640080"/>
-          </a:xfrm>
-          <a:prstGeom prst="rect">
-            <a:avLst/>
-          </a:prstGeom>
-          <a:noFill/>
-        </p:spPr>
-        <p:txBody>
-          <a:bodyPr wrap="square">
-            <a:spAutoFit/>
-          </a:bodyPr>
+          <a:bodyPr wrap="square" rtlCol="0" anchor="ctr"/>
           <a:lstStyle/>
           <a:p>
             <a:pPr algn="ctr">
-              <a:defRPr sz="3200" b="0">
+              <a:defRPr sz="1400" b="1">
                 <a:solidFill>
                   <a:srgbClr val="FFFFFF"/>
                 </a:solidFill>
@@ -5732,57 +5913,21 @@
               </a:defRPr>
             </a:pPr>
             <a:r>
-              <a:t>🎨</a:t>
-            </a:r>
-          </a:p>
-        </p:txBody>
-      </p:sp>
-      <p:sp>
-        <p:nvSpPr>
-          <p:cNvPr id="6" name="TextBox 5"/>
-          <p:cNvSpPr txBox="1"/>
-          <p:nvPr/>
-        </p:nvSpPr>
-        <p:spPr>
-          <a:xfrm>
-            <a:off x="457200" y="2011680"/>
-            <a:ext cx="2011680" cy="457200"/>
-          </a:xfrm>
-          <a:prstGeom prst="rect">
-            <a:avLst/>
-          </a:prstGeom>
-          <a:noFill/>
-        </p:spPr>
-        <p:txBody>
-          <a:bodyPr wrap="square">
-            <a:spAutoFit/>
-          </a:bodyPr>
-          <a:lstStyle/>
-          <a:p>
-            <a:pPr algn="ctr">
-              <a:defRPr sz="1600" b="1">
-                <a:solidFill>
-                  <a:srgbClr val="FFFFFF"/>
-                </a:solidFill>
-                <a:latin typeface="Calibri"/>
-              </a:defRPr>
-            </a:pPr>
-            <a:r>
-              <a:t>Game Designer</a:t>
-            </a:r>
-          </a:p>
-        </p:txBody>
-      </p:sp>
-      <p:sp>
-        <p:nvSpPr>
-          <p:cNvPr id="7" name="Rounded Rectangle 6"/>
+              <a:t>User Input</a:t>
+            </a:r>
+          </a:p>
+        </p:txBody>
+      </p:sp>
+      <p:sp>
+        <p:nvSpPr>
+          <p:cNvPr id="5" name="Rounded Rectangle 4"/>
           <p:cNvSpPr/>
           <p:nvPr/>
         </p:nvSpPr>
         <p:spPr>
           <a:xfrm>
-            <a:off x="731520" y="2514600"/>
-            <a:ext cx="1463040" cy="320040"/>
+            <a:off x="2286000" y="1828800"/>
+            <a:ext cx="1645920" cy="822960"/>
           </a:xfrm>
           <a:prstGeom prst="roundRect">
             <a:avLst/>
@@ -5810,11 +5955,11 @@
           </a:fontRef>
         </p:style>
         <p:txBody>
-          <a:bodyPr rtlCol="0" anchor="ctr"/>
+          <a:bodyPr wrap="square" rtlCol="0" anchor="ctr"/>
           <a:lstStyle/>
           <a:p>
             <a:pPr algn="ctr">
-              <a:defRPr sz="1000">
+              <a:defRPr sz="1400" b="1">
                 <a:solidFill>
                   <a:srgbClr val="FFFFFF"/>
                 </a:solidFill>
@@ -5822,214 +5967,25 @@
               </a:defRPr>
             </a:pPr>
             <a:r>
-              <a:t>Design Layer</a:t>
-            </a:r>
-          </a:p>
-        </p:txBody>
-      </p:sp>
-      <p:sp>
-        <p:nvSpPr>
-          <p:cNvPr id="8" name="TextBox 7"/>
-          <p:cNvSpPr txBox="1"/>
-          <p:nvPr/>
-        </p:nvSpPr>
-        <p:spPr>
-          <a:xfrm>
-            <a:off x="548640" y="3017520"/>
-            <a:ext cx="1828800" cy="365760"/>
-          </a:xfrm>
-          <a:prstGeom prst="rect">
-            <a:avLst/>
-          </a:prstGeom>
-          <a:noFill/>
-        </p:spPr>
-        <p:txBody>
-          <a:bodyPr wrap="square">
-            <a:spAutoFit/>
-          </a:bodyPr>
-          <a:lstStyle/>
-          <a:p>
-            <a:pPr algn="ctr">
-              <a:defRPr sz="1200" b="1">
-                <a:solidFill>
-                  <a:srgbClr val="00D2FF"/>
-                </a:solidFill>
-                <a:latin typeface="Calibri"/>
-              </a:defRPr>
-            </a:pPr>
-            <a:r>
-              <a:t>LLM (temp 0.8)</a:t>
-            </a:r>
-          </a:p>
-        </p:txBody>
-      </p:sp>
-      <p:sp>
-        <p:nvSpPr>
-          <p:cNvPr id="9" name="TextBox 8"/>
-          <p:cNvSpPr txBox="1"/>
-          <p:nvPr/>
-        </p:nvSpPr>
-        <p:spPr>
-          <a:xfrm>
-            <a:off x="548640" y="3383280"/>
-            <a:ext cx="1828800" cy="2286000"/>
-          </a:xfrm>
-          <a:prstGeom prst="rect">
-            <a:avLst/>
-          </a:prstGeom>
-          <a:noFill/>
-        </p:spPr>
-        <p:txBody>
-          <a:bodyPr wrap="square">
-            <a:spAutoFit/>
-          </a:bodyPr>
-          <a:lstStyle/>
-          <a:p>
-            <a:pPr algn="ctr">
-              <a:defRPr sz="1300" b="0">
-                <a:solidFill>
-                  <a:srgbClr val="BBBBCC"/>
-                </a:solidFill>
-                <a:latin typeface="Calibri"/>
-              </a:defRPr>
-            </a:pPr>
-            <a:r>
-              <a:t>Chooses push/slide mechanic</a:t>
+              <a:t>Game</a:t>
             </a:r>
             <a:br/>
             <a:r>
-              <a:t>Designs visual theme &amp; emojis</a:t>
-            </a:r>
-          </a:p>
-        </p:txBody>
-      </p:sp>
-      <p:sp>
-        <p:nvSpPr>
-          <p:cNvPr id="10" name="Rounded Rectangle 9"/>
+              <a:t>Designer</a:t>
+            </a:r>
+          </a:p>
+        </p:txBody>
+      </p:sp>
+      <p:sp>
+        <p:nvSpPr>
+          <p:cNvPr id="6" name="Rounded Rectangle 5"/>
           <p:cNvSpPr/>
           <p:nvPr/>
         </p:nvSpPr>
         <p:spPr>
           <a:xfrm>
-            <a:off x="2743200" y="1371600"/>
-            <a:ext cx="2011680" cy="4572000"/>
-          </a:xfrm>
-          <a:prstGeom prst="roundRect">
-            <a:avLst/>
-          </a:prstGeom>
-          <a:solidFill>
-            <a:srgbClr val="16213E"/>
-          </a:solidFill>
-          <a:ln>
-            <a:noFill/>
-          </a:ln>
-          <a:effectLst/>
-        </p:spPr>
-        <p:style>
-          <a:lnRef idx="1">
-            <a:schemeClr val="accent1"/>
-          </a:lnRef>
-          <a:fillRef idx="3">
-            <a:schemeClr val="accent1"/>
-          </a:fillRef>
-          <a:effectRef idx="2">
-            <a:schemeClr val="accent1"/>
-          </a:effectRef>
-          <a:fontRef idx="minor">
-            <a:schemeClr val="lt1"/>
-          </a:fontRef>
-        </p:style>
-        <p:txBody>
-          <a:bodyPr rtlCol="0" anchor="ctr"/>
-          <a:lstStyle/>
-          <a:p>
-            <a:pPr algn="ctr"/>
-            <a:endParaRPr/>
-          </a:p>
-        </p:txBody>
-      </p:sp>
-      <p:sp>
-        <p:nvSpPr>
-          <p:cNvPr id="11" name="TextBox 10"/>
-          <p:cNvSpPr txBox="1"/>
-          <p:nvPr/>
-        </p:nvSpPr>
-        <p:spPr>
-          <a:xfrm>
-            <a:off x="2743200" y="1463040"/>
-            <a:ext cx="2011680" cy="640080"/>
-          </a:xfrm>
-          <a:prstGeom prst="rect">
-            <a:avLst/>
-          </a:prstGeom>
-          <a:noFill/>
-        </p:spPr>
-        <p:txBody>
-          <a:bodyPr wrap="square">
-            <a:spAutoFit/>
-          </a:bodyPr>
-          <a:lstStyle/>
-          <a:p>
-            <a:pPr algn="ctr">
-              <a:defRPr sz="3200" b="0">
-                <a:solidFill>
-                  <a:srgbClr val="FFFFFF"/>
-                </a:solidFill>
-                <a:latin typeface="Calibri"/>
-              </a:defRPr>
-            </a:pPr>
-            <a:r>
-              <a:t>🏗️</a:t>
-            </a:r>
-          </a:p>
-        </p:txBody>
-      </p:sp>
-      <p:sp>
-        <p:nvSpPr>
-          <p:cNvPr id="12" name="TextBox 11"/>
-          <p:cNvSpPr txBox="1"/>
-          <p:nvPr/>
-        </p:nvSpPr>
-        <p:spPr>
-          <a:xfrm>
-            <a:off x="2743200" y="2011680"/>
-            <a:ext cx="2011680" cy="457200"/>
-          </a:xfrm>
-          <a:prstGeom prst="rect">
-            <a:avLst/>
-          </a:prstGeom>
-          <a:noFill/>
-        </p:spPr>
-        <p:txBody>
-          <a:bodyPr wrap="square">
-            <a:spAutoFit/>
-          </a:bodyPr>
-          <a:lstStyle/>
-          <a:p>
-            <a:pPr algn="ctr">
-              <a:defRPr sz="1600" b="1">
-                <a:solidFill>
-                  <a:srgbClr val="FFFFFF"/>
-                </a:solidFill>
-                <a:latin typeface="Calibri"/>
-              </a:defRPr>
-            </a:pPr>
-            <a:r>
-              <a:t>Level Designer</a:t>
-            </a:r>
-          </a:p>
-        </p:txBody>
-      </p:sp>
-      <p:sp>
-        <p:nvSpPr>
-          <p:cNvPr id="13" name="Rounded Rectangle 12"/>
-          <p:cNvSpPr/>
-          <p:nvPr/>
-        </p:nvSpPr>
-        <p:spPr>
-          <a:xfrm>
-            <a:off x="3017520" y="2514600"/>
-            <a:ext cx="1463040" cy="320040"/>
+            <a:off x="4297680" y="1828800"/>
+            <a:ext cx="1645920" cy="822960"/>
           </a:xfrm>
           <a:prstGeom prst="roundRect">
             <a:avLst/>
@@ -6057,11 +6013,11 @@
           </a:fontRef>
         </p:style>
         <p:txBody>
-          <a:bodyPr rtlCol="0" anchor="ctr"/>
+          <a:bodyPr wrap="square" rtlCol="0" anchor="ctr"/>
           <a:lstStyle/>
           <a:p>
             <a:pPr algn="ctr">
-              <a:defRPr sz="1000">
+              <a:defRPr sz="1400" b="1">
                 <a:solidFill>
                   <a:srgbClr val="FFFFFF"/>
                 </a:solidFill>
@@ -6069,214 +6025,25 @@
               </a:defRPr>
             </a:pPr>
             <a:r>
-              <a:t>Design Layer</a:t>
-            </a:r>
-          </a:p>
-        </p:txBody>
-      </p:sp>
-      <p:sp>
-        <p:nvSpPr>
-          <p:cNvPr id="14" name="TextBox 13"/>
-          <p:cNvSpPr txBox="1"/>
-          <p:nvPr/>
-        </p:nvSpPr>
-        <p:spPr>
-          <a:xfrm>
-            <a:off x="2834640" y="3017520"/>
-            <a:ext cx="1828800" cy="365760"/>
-          </a:xfrm>
-          <a:prstGeom prst="rect">
-            <a:avLst/>
-          </a:prstGeom>
-          <a:noFill/>
-        </p:spPr>
-        <p:txBody>
-          <a:bodyPr wrap="square">
-            <a:spAutoFit/>
-          </a:bodyPr>
-          <a:lstStyle/>
-          <a:p>
-            <a:pPr algn="ctr">
-              <a:defRPr sz="1200" b="1">
-                <a:solidFill>
-                  <a:srgbClr val="00D2FF"/>
-                </a:solidFill>
-                <a:latin typeface="Calibri"/>
-              </a:defRPr>
-            </a:pPr>
-            <a:r>
-              <a:t>LLM (temp 0.7)</a:t>
-            </a:r>
-          </a:p>
-        </p:txBody>
-      </p:sp>
-      <p:sp>
-        <p:nvSpPr>
-          <p:cNvPr id="15" name="TextBox 14"/>
-          <p:cNvSpPr txBox="1"/>
-          <p:nvPr/>
-        </p:nvSpPr>
-        <p:spPr>
-          <a:xfrm>
-            <a:off x="2834640" y="3383280"/>
-            <a:ext cx="1828800" cy="2286000"/>
-          </a:xfrm>
-          <a:prstGeom prst="rect">
-            <a:avLst/>
-          </a:prstGeom>
-          <a:noFill/>
-        </p:spPr>
-        <p:txBody>
-          <a:bodyPr wrap="square">
-            <a:spAutoFit/>
-          </a:bodyPr>
-          <a:lstStyle/>
-          <a:p>
-            <a:pPr algn="ctr">
-              <a:defRPr sz="1300" b="0">
-                <a:solidFill>
-                  <a:srgbClr val="BBBBCC"/>
-                </a:solidFill>
-                <a:latin typeface="Calibri"/>
-              </a:defRPr>
-            </a:pPr>
-            <a:r>
-              <a:t>Creates grid layouts</a:t>
+              <a:t>Level</a:t>
             </a:r>
             <a:br/>
             <a:r>
-              <a:t>Slide-specific guidance</a:t>
-            </a:r>
-          </a:p>
-        </p:txBody>
-      </p:sp>
-      <p:sp>
-        <p:nvSpPr>
-          <p:cNvPr id="16" name="Rounded Rectangle 15"/>
+              <a:t>Designer</a:t>
+            </a:r>
+          </a:p>
+        </p:txBody>
+      </p:sp>
+      <p:sp>
+        <p:nvSpPr>
+          <p:cNvPr id="7" name="Rounded Rectangle 6"/>
           <p:cNvSpPr/>
           <p:nvPr/>
         </p:nvSpPr>
         <p:spPr>
           <a:xfrm>
-            <a:off x="5029200" y="1371600"/>
-            <a:ext cx="2011680" cy="4572000"/>
-          </a:xfrm>
-          <a:prstGeom prst="roundRect">
-            <a:avLst/>
-          </a:prstGeom>
-          <a:solidFill>
-            <a:srgbClr val="16213E"/>
-          </a:solidFill>
-          <a:ln>
-            <a:noFill/>
-          </a:ln>
-          <a:effectLst/>
-        </p:spPr>
-        <p:style>
-          <a:lnRef idx="1">
-            <a:schemeClr val="accent1"/>
-          </a:lnRef>
-          <a:fillRef idx="3">
-            <a:schemeClr val="accent1"/>
-          </a:fillRef>
-          <a:effectRef idx="2">
-            <a:schemeClr val="accent1"/>
-          </a:effectRef>
-          <a:fontRef idx="minor">
-            <a:schemeClr val="lt1"/>
-          </a:fontRef>
-        </p:style>
-        <p:txBody>
-          <a:bodyPr rtlCol="0" anchor="ctr"/>
-          <a:lstStyle/>
-          <a:p>
-            <a:pPr algn="ctr"/>
-            <a:endParaRPr/>
-          </a:p>
-        </p:txBody>
-      </p:sp>
-      <p:sp>
-        <p:nvSpPr>
-          <p:cNvPr id="17" name="TextBox 16"/>
-          <p:cNvSpPr txBox="1"/>
-          <p:nvPr/>
-        </p:nvSpPr>
-        <p:spPr>
-          <a:xfrm>
-            <a:off x="5029200" y="1463040"/>
-            <a:ext cx="2011680" cy="640080"/>
-          </a:xfrm>
-          <a:prstGeom prst="rect">
-            <a:avLst/>
-          </a:prstGeom>
-          <a:noFill/>
-        </p:spPr>
-        <p:txBody>
-          <a:bodyPr wrap="square">
-            <a:spAutoFit/>
-          </a:bodyPr>
-          <a:lstStyle/>
-          <a:p>
-            <a:pPr algn="ctr">
-              <a:defRPr sz="3200" b="0">
-                <a:solidFill>
-                  <a:srgbClr val="FFFFFF"/>
-                </a:solidFill>
-                <a:latin typeface="Calibri"/>
-              </a:defRPr>
-            </a:pPr>
-            <a:r>
-              <a:t>⚙️</a:t>
-            </a:r>
-          </a:p>
-        </p:txBody>
-      </p:sp>
-      <p:sp>
-        <p:nvSpPr>
-          <p:cNvPr id="18" name="TextBox 17"/>
-          <p:cNvSpPr txBox="1"/>
-          <p:nvPr/>
-        </p:nvSpPr>
-        <p:spPr>
-          <a:xfrm>
-            <a:off x="5029200" y="2011680"/>
-            <a:ext cx="2011680" cy="457200"/>
-          </a:xfrm>
-          <a:prstGeom prst="rect">
-            <a:avLst/>
-          </a:prstGeom>
-          <a:noFill/>
-        </p:spPr>
-        <p:txBody>
-          <a:bodyPr wrap="square">
-            <a:spAutoFit/>
-          </a:bodyPr>
-          <a:lstStyle/>
-          <a:p>
-            <a:pPr algn="ctr">
-              <a:defRPr sz="1600" b="1">
-                <a:solidFill>
-                  <a:srgbClr val="FFFFFF"/>
-                </a:solidFill>
-                <a:latin typeface="Calibri"/>
-              </a:defRPr>
-            </a:pPr>
-            <a:r>
-              <a:t>Developer</a:t>
-            </a:r>
-          </a:p>
-        </p:txBody>
-      </p:sp>
-      <p:sp>
-        <p:nvSpPr>
-          <p:cNvPr id="19" name="Rounded Rectangle 18"/>
-          <p:cNvSpPr/>
-          <p:nvPr/>
-        </p:nvSpPr>
-        <p:spPr>
-          <a:xfrm>
-            <a:off x="5303520" y="2514600"/>
-            <a:ext cx="1463040" cy="320040"/>
+            <a:off x="6309360" y="1828800"/>
+            <a:ext cx="1645920" cy="822960"/>
           </a:xfrm>
           <a:prstGeom prst="roundRect">
             <a:avLst/>
@@ -6304,11 +6071,11 @@
           </a:fontRef>
         </p:style>
         <p:txBody>
-          <a:bodyPr rtlCol="0" anchor="ctr"/>
+          <a:bodyPr wrap="square" rtlCol="0" anchor="ctr"/>
           <a:lstStyle/>
           <a:p>
             <a:pPr algn="ctr">
-              <a:defRPr sz="1000">
+              <a:defRPr sz="1400" b="1">
                 <a:solidFill>
                   <a:srgbClr val="FFFFFF"/>
                 </a:solidFill>
@@ -6316,214 +6083,21 @@
               </a:defRPr>
             </a:pPr>
             <a:r>
-              <a:t>Implementation</a:t>
-            </a:r>
-          </a:p>
-        </p:txBody>
-      </p:sp>
-      <p:sp>
-        <p:nvSpPr>
-          <p:cNvPr id="20" name="TextBox 19"/>
-          <p:cNvSpPr txBox="1"/>
-          <p:nvPr/>
-        </p:nvSpPr>
-        <p:spPr>
-          <a:xfrm>
-            <a:off x="5120640" y="3017520"/>
-            <a:ext cx="1828800" cy="365760"/>
-          </a:xfrm>
-          <a:prstGeom prst="rect">
-            <a:avLst/>
-          </a:prstGeom>
-          <a:noFill/>
-        </p:spPr>
-        <p:txBody>
-          <a:bodyPr wrap="square">
-            <a:spAutoFit/>
-          </a:bodyPr>
-          <a:lstStyle/>
-          <a:p>
-            <a:pPr algn="ctr">
-              <a:defRPr sz="1200" b="1">
-                <a:solidFill>
-                  <a:srgbClr val="00D2FF"/>
-                </a:solidFill>
-                <a:latin typeface="Calibri"/>
-              </a:defRPr>
-            </a:pPr>
-            <a:r>
-              <a:t>Deterministic</a:t>
-            </a:r>
-          </a:p>
-        </p:txBody>
-      </p:sp>
-      <p:sp>
-        <p:nvSpPr>
-          <p:cNvPr id="21" name="TextBox 20"/>
-          <p:cNvSpPr txBox="1"/>
-          <p:nvPr/>
-        </p:nvSpPr>
-        <p:spPr>
-          <a:xfrm>
-            <a:off x="5120640" y="3383280"/>
-            <a:ext cx="1828800" cy="2286000"/>
-          </a:xfrm>
-          <a:prstGeom prst="rect">
-            <a:avLst/>
-          </a:prstGeom>
-          <a:noFill/>
-        </p:spPr>
-        <p:txBody>
-          <a:bodyPr wrap="square">
-            <a:spAutoFit/>
-          </a:bodyPr>
-          <a:lstStyle/>
-          <a:p>
-            <a:pPr algn="ctr">
-              <a:defRPr sz="1300" b="0">
-                <a:solidFill>
-                  <a:srgbClr val="BBBBCC"/>
-                </a:solidFill>
-                <a:latin typeface="Calibri"/>
-              </a:defRPr>
-            </a:pPr>
-            <a:r>
-              <a:t>Translates designs to config</a:t>
-            </a:r>
-            <a:br/>
-            <a:r>
-              <a:t>Routes failures (10 criteria)</a:t>
-            </a:r>
-          </a:p>
-        </p:txBody>
-      </p:sp>
-      <p:sp>
-        <p:nvSpPr>
-          <p:cNvPr id="22" name="Rounded Rectangle 21"/>
+              <a:t>Developer</a:t>
+            </a:r>
+          </a:p>
+        </p:txBody>
+      </p:sp>
+      <p:sp>
+        <p:nvSpPr>
+          <p:cNvPr id="8" name="Rounded Rectangle 7"/>
           <p:cNvSpPr/>
           <p:nvPr/>
         </p:nvSpPr>
         <p:spPr>
           <a:xfrm>
-            <a:off x="7315200" y="1371600"/>
-            <a:ext cx="2011680" cy="4572000"/>
-          </a:xfrm>
-          <a:prstGeom prst="roundRect">
-            <a:avLst/>
-          </a:prstGeom>
-          <a:solidFill>
-            <a:srgbClr val="16213E"/>
-          </a:solidFill>
-          <a:ln>
-            <a:noFill/>
-          </a:ln>
-          <a:effectLst/>
-        </p:spPr>
-        <p:style>
-          <a:lnRef idx="1">
-            <a:schemeClr val="accent1"/>
-          </a:lnRef>
-          <a:fillRef idx="3">
-            <a:schemeClr val="accent1"/>
-          </a:fillRef>
-          <a:effectRef idx="2">
-            <a:schemeClr val="accent1"/>
-          </a:effectRef>
-          <a:fontRef idx="minor">
-            <a:schemeClr val="lt1"/>
-          </a:fontRef>
-        </p:style>
-        <p:txBody>
-          <a:bodyPr rtlCol="0" anchor="ctr"/>
-          <a:lstStyle/>
-          <a:p>
-            <a:pPr algn="ctr"/>
-            <a:endParaRPr/>
-          </a:p>
-        </p:txBody>
-      </p:sp>
-      <p:sp>
-        <p:nvSpPr>
-          <p:cNvPr id="23" name="TextBox 22"/>
-          <p:cNvSpPr txBox="1"/>
-          <p:nvPr/>
-        </p:nvSpPr>
-        <p:spPr>
-          <a:xfrm>
-            <a:off x="7315200" y="1463040"/>
-            <a:ext cx="2011680" cy="640080"/>
-          </a:xfrm>
-          <a:prstGeom prst="rect">
-            <a:avLst/>
-          </a:prstGeom>
-          <a:noFill/>
-        </p:spPr>
-        <p:txBody>
-          <a:bodyPr wrap="square">
-            <a:spAutoFit/>
-          </a:bodyPr>
-          <a:lstStyle/>
-          <a:p>
-            <a:pPr algn="ctr">
-              <a:defRPr sz="3200" b="0">
-                <a:solidFill>
-                  <a:srgbClr val="FFFFFF"/>
-                </a:solidFill>
-                <a:latin typeface="Calibri"/>
-              </a:defRPr>
-            </a:pPr>
-            <a:r>
-              <a:t>✅</a:t>
-            </a:r>
-          </a:p>
-        </p:txBody>
-      </p:sp>
-      <p:sp>
-        <p:nvSpPr>
-          <p:cNvPr id="24" name="TextBox 23"/>
-          <p:cNvSpPr txBox="1"/>
-          <p:nvPr/>
-        </p:nvSpPr>
-        <p:spPr>
-          <a:xfrm>
-            <a:off x="7315200" y="2011680"/>
-            <a:ext cx="2011680" cy="457200"/>
-          </a:xfrm>
-          <a:prstGeom prst="rect">
-            <a:avLst/>
-          </a:prstGeom>
-          <a:noFill/>
-        </p:spPr>
-        <p:txBody>
-          <a:bodyPr wrap="square">
-            <a:spAutoFit/>
-          </a:bodyPr>
-          <a:lstStyle/>
-          <a:p>
-            <a:pPr algn="ctr">
-              <a:defRPr sz="1600" b="1">
-                <a:solidFill>
-                  <a:srgbClr val="FFFFFF"/>
-                </a:solidFill>
-                <a:latin typeface="Calibri"/>
-              </a:defRPr>
-            </a:pPr>
-            <a:r>
-              <a:t>QA Tester</a:t>
-            </a:r>
-          </a:p>
-        </p:txBody>
-      </p:sp>
-      <p:sp>
-        <p:nvSpPr>
-          <p:cNvPr id="25" name="Rounded Rectangle 24"/>
-          <p:cNvSpPr/>
-          <p:nvPr/>
-        </p:nvSpPr>
-        <p:spPr>
-          <a:xfrm>
-            <a:off x="7589520" y="2514600"/>
-            <a:ext cx="1463040" cy="320040"/>
+            <a:off x="8321040" y="1828800"/>
+            <a:ext cx="1645920" cy="822960"/>
           </a:xfrm>
           <a:prstGeom prst="roundRect">
             <a:avLst/>
@@ -6551,11 +6125,11 @@
           </a:fontRef>
         </p:style>
         <p:txBody>
-          <a:bodyPr rtlCol="0" anchor="ctr"/>
+          <a:bodyPr wrap="square" rtlCol="0" anchor="ctr"/>
           <a:lstStyle/>
           <a:p>
             <a:pPr algn="ctr">
-              <a:defRPr sz="1000">
+              <a:defRPr sz="1400" b="1">
                 <a:solidFill>
                   <a:srgbClr val="FFFFFF"/>
                 </a:solidFill>
@@ -6563,103 +6137,27 @@
               </a:defRPr>
             </a:pPr>
             <a:r>
-              <a:t>Implementation</a:t>
-            </a:r>
-          </a:p>
-        </p:txBody>
-      </p:sp>
-      <p:sp>
-        <p:nvSpPr>
-          <p:cNvPr id="26" name="TextBox 25"/>
-          <p:cNvSpPr txBox="1"/>
-          <p:nvPr/>
-        </p:nvSpPr>
-        <p:spPr>
-          <a:xfrm>
-            <a:off x="7406640" y="3017520"/>
-            <a:ext cx="1828800" cy="365760"/>
-          </a:xfrm>
-          <a:prstGeom prst="rect">
-            <a:avLst/>
-          </a:prstGeom>
-          <a:noFill/>
-        </p:spPr>
-        <p:txBody>
-          <a:bodyPr wrap="square">
-            <a:spAutoFit/>
-          </a:bodyPr>
-          <a:lstStyle/>
-          <a:p>
-            <a:pPr algn="ctr">
-              <a:defRPr sz="1200" b="1">
-                <a:solidFill>
-                  <a:srgbClr val="00D2FF"/>
-                </a:solidFill>
-                <a:latin typeface="Calibri"/>
-              </a:defRPr>
-            </a:pPr>
-            <a:r>
-              <a:t>BFS Solver</a:t>
-            </a:r>
-          </a:p>
-        </p:txBody>
-      </p:sp>
-      <p:sp>
-        <p:nvSpPr>
-          <p:cNvPr id="27" name="TextBox 26"/>
-          <p:cNvSpPr txBox="1"/>
-          <p:nvPr/>
-        </p:nvSpPr>
-        <p:spPr>
-          <a:xfrm>
-            <a:off x="7406640" y="3383280"/>
-            <a:ext cx="1828800" cy="2286000"/>
-          </a:xfrm>
-          <a:prstGeom prst="rect">
-            <a:avLst/>
-          </a:prstGeom>
-          <a:noFill/>
-        </p:spPr>
-        <p:txBody>
-          <a:bodyPr wrap="square">
-            <a:spAutoFit/>
-          </a:bodyPr>
-          <a:lstStyle/>
-          <a:p>
-            <a:pPr algn="ctr">
-              <a:defRPr sz="1300" b="0">
-                <a:solidFill>
-                  <a:srgbClr val="BBBBCC"/>
-                </a:solidFill>
-                <a:latin typeface="Calibri"/>
-              </a:defRPr>
-            </a:pPr>
-            <a:r>
-              <a:t>Verifies solvability</a:t>
-            </a:r>
-            <a:br/>
-            <a:r>
-              <a:t>Difficulty &amp; diversity checks</a:t>
-            </a:r>
-          </a:p>
-        </p:txBody>
-      </p:sp>
-      <p:sp>
-        <p:nvSpPr>
-          <p:cNvPr id="28" name="Rounded Rectangle 27"/>
+              <a:t>QA Tester</a:t>
+            </a:r>
+          </a:p>
+        </p:txBody>
+      </p:sp>
+      <p:sp>
+        <p:nvSpPr>
+          <p:cNvPr id="9" name="Rounded Rectangle 8"/>
           <p:cNvSpPr/>
           <p:nvPr/>
         </p:nvSpPr>
         <p:spPr>
           <a:xfrm>
-            <a:off x="9601200" y="1371600"/>
-            <a:ext cx="2011680" cy="4572000"/>
+            <a:off x="10332720" y="1828800"/>
+            <a:ext cx="1645920" cy="822960"/>
           </a:xfrm>
           <a:prstGeom prst="roundRect">
             <a:avLst/>
           </a:prstGeom>
           <a:solidFill>
-            <a:srgbClr val="16213E"/>
+            <a:srgbClr val="2ECC71"/>
           </a:solidFill>
           <a:ln>
             <a:noFill/>
@@ -6681,6 +6179,59 @@
           </a:fontRef>
         </p:style>
         <p:txBody>
+          <a:bodyPr wrap="square" rtlCol="0" anchor="ctr"/>
+          <a:lstStyle/>
+          <a:p>
+            <a:pPr algn="ctr">
+              <a:defRPr sz="1400" b="1">
+                <a:solidFill>
+                  <a:srgbClr val="FFFFFF"/>
+                </a:solidFill>
+                <a:latin typeface="Calibri"/>
+              </a:defRPr>
+            </a:pPr>
+            <a:r>
+              <a:t>Finalize</a:t>
+            </a:r>
+          </a:p>
+        </p:txBody>
+      </p:sp>
+      <p:sp>
+        <p:nvSpPr>
+          <p:cNvPr id="10" name="Right Arrow 9"/>
+          <p:cNvSpPr/>
+          <p:nvPr/>
+        </p:nvSpPr>
+        <p:spPr>
+          <a:xfrm>
+            <a:off x="1965960" y="2103120"/>
+            <a:ext cx="274320" cy="274320"/>
+          </a:xfrm>
+          <a:prstGeom prst="rightArrow">
+            <a:avLst/>
+          </a:prstGeom>
+          <a:solidFill>
+            <a:srgbClr val="00D2FF"/>
+          </a:solidFill>
+          <a:ln>
+            <a:noFill/>
+          </a:ln>
+        </p:spPr>
+        <p:style>
+          <a:lnRef idx="1">
+            <a:schemeClr val="accent1"/>
+          </a:lnRef>
+          <a:fillRef idx="3">
+            <a:schemeClr val="accent1"/>
+          </a:fillRef>
+          <a:effectRef idx="2">
+            <a:schemeClr val="accent1"/>
+          </a:effectRef>
+          <a:fontRef idx="minor">
+            <a:schemeClr val="lt1"/>
+          </a:fontRef>
+        </p:style>
+        <p:txBody>
           <a:bodyPr rtlCol="0" anchor="ctr"/>
           <a:lstStyle/>
           <a:p>
@@ -6691,14 +6242,235 @@
       </p:sp>
       <p:sp>
         <p:nvSpPr>
-          <p:cNvPr id="29" name="TextBox 28"/>
+          <p:cNvPr id="11" name="Right Arrow 10"/>
+          <p:cNvSpPr/>
+          <p:nvPr/>
+        </p:nvSpPr>
+        <p:spPr>
+          <a:xfrm>
+            <a:off x="3977640" y="2103120"/>
+            <a:ext cx="274320" cy="274320"/>
+          </a:xfrm>
+          <a:prstGeom prst="rightArrow">
+            <a:avLst/>
+          </a:prstGeom>
+          <a:solidFill>
+            <a:srgbClr val="00D2FF"/>
+          </a:solidFill>
+          <a:ln>
+            <a:noFill/>
+          </a:ln>
+        </p:spPr>
+        <p:style>
+          <a:lnRef idx="1">
+            <a:schemeClr val="accent1"/>
+          </a:lnRef>
+          <a:fillRef idx="3">
+            <a:schemeClr val="accent1"/>
+          </a:fillRef>
+          <a:effectRef idx="2">
+            <a:schemeClr val="accent1"/>
+          </a:effectRef>
+          <a:fontRef idx="minor">
+            <a:schemeClr val="lt1"/>
+          </a:fontRef>
+        </p:style>
+        <p:txBody>
+          <a:bodyPr rtlCol="0" anchor="ctr"/>
+          <a:lstStyle/>
+          <a:p>
+            <a:pPr algn="ctr"/>
+            <a:endParaRPr/>
+          </a:p>
+        </p:txBody>
+      </p:sp>
+      <p:sp>
+        <p:nvSpPr>
+          <p:cNvPr id="12" name="Right Arrow 11"/>
+          <p:cNvSpPr/>
+          <p:nvPr/>
+        </p:nvSpPr>
+        <p:spPr>
+          <a:xfrm>
+            <a:off x="5989320" y="2103120"/>
+            <a:ext cx="274320" cy="274320"/>
+          </a:xfrm>
+          <a:prstGeom prst="rightArrow">
+            <a:avLst/>
+          </a:prstGeom>
+          <a:solidFill>
+            <a:srgbClr val="00D2FF"/>
+          </a:solidFill>
+          <a:ln>
+            <a:noFill/>
+          </a:ln>
+        </p:spPr>
+        <p:style>
+          <a:lnRef idx="1">
+            <a:schemeClr val="accent1"/>
+          </a:lnRef>
+          <a:fillRef idx="3">
+            <a:schemeClr val="accent1"/>
+          </a:fillRef>
+          <a:effectRef idx="2">
+            <a:schemeClr val="accent1"/>
+          </a:effectRef>
+          <a:fontRef idx="minor">
+            <a:schemeClr val="lt1"/>
+          </a:fontRef>
+        </p:style>
+        <p:txBody>
+          <a:bodyPr rtlCol="0" anchor="ctr"/>
+          <a:lstStyle/>
+          <a:p>
+            <a:pPr algn="ctr"/>
+            <a:endParaRPr/>
+          </a:p>
+        </p:txBody>
+      </p:sp>
+      <p:sp>
+        <p:nvSpPr>
+          <p:cNvPr id="13" name="Right Arrow 12"/>
+          <p:cNvSpPr/>
+          <p:nvPr/>
+        </p:nvSpPr>
+        <p:spPr>
+          <a:xfrm>
+            <a:off x="8001000" y="2103120"/>
+            <a:ext cx="274320" cy="274320"/>
+          </a:xfrm>
+          <a:prstGeom prst="rightArrow">
+            <a:avLst/>
+          </a:prstGeom>
+          <a:solidFill>
+            <a:srgbClr val="00D2FF"/>
+          </a:solidFill>
+          <a:ln>
+            <a:noFill/>
+          </a:ln>
+        </p:spPr>
+        <p:style>
+          <a:lnRef idx="1">
+            <a:schemeClr val="accent1"/>
+          </a:lnRef>
+          <a:fillRef idx="3">
+            <a:schemeClr val="accent1"/>
+          </a:fillRef>
+          <a:effectRef idx="2">
+            <a:schemeClr val="accent1"/>
+          </a:effectRef>
+          <a:fontRef idx="minor">
+            <a:schemeClr val="lt1"/>
+          </a:fontRef>
+        </p:style>
+        <p:txBody>
+          <a:bodyPr rtlCol="0" anchor="ctr"/>
+          <a:lstStyle/>
+          <a:p>
+            <a:pPr algn="ctr"/>
+            <a:endParaRPr/>
+          </a:p>
+        </p:txBody>
+      </p:sp>
+      <p:sp>
+        <p:nvSpPr>
+          <p:cNvPr id="14" name="Right Arrow 13"/>
+          <p:cNvSpPr/>
+          <p:nvPr/>
+        </p:nvSpPr>
+        <p:spPr>
+          <a:xfrm>
+            <a:off x="10012680" y="2103120"/>
+            <a:ext cx="274320" cy="274320"/>
+          </a:xfrm>
+          <a:prstGeom prst="rightArrow">
+            <a:avLst/>
+          </a:prstGeom>
+          <a:solidFill>
+            <a:srgbClr val="00D2FF"/>
+          </a:solidFill>
+          <a:ln>
+            <a:noFill/>
+          </a:ln>
+        </p:spPr>
+        <p:style>
+          <a:lnRef idx="1">
+            <a:schemeClr val="accent1"/>
+          </a:lnRef>
+          <a:fillRef idx="3">
+            <a:schemeClr val="accent1"/>
+          </a:fillRef>
+          <a:effectRef idx="2">
+            <a:schemeClr val="accent1"/>
+          </a:effectRef>
+          <a:fontRef idx="minor">
+            <a:schemeClr val="lt1"/>
+          </a:fontRef>
+        </p:style>
+        <p:txBody>
+          <a:bodyPr rtlCol="0" anchor="ctr"/>
+          <a:lstStyle/>
+          <a:p>
+            <a:pPr algn="ctr"/>
+            <a:endParaRPr/>
+          </a:p>
+        </p:txBody>
+      </p:sp>
+      <p:sp>
+        <p:nvSpPr>
+          <p:cNvPr id="15" name="Rounded Rectangle 14"/>
+          <p:cNvSpPr/>
+          <p:nvPr/>
+        </p:nvSpPr>
+        <p:spPr>
+          <a:xfrm>
+            <a:off x="6309360" y="3200400"/>
+            <a:ext cx="5669280" cy="2926080"/>
+          </a:xfrm>
+          <a:prstGeom prst="roundRect">
+            <a:avLst/>
+          </a:prstGeom>
+          <a:solidFill>
+            <a:srgbClr val="1E1E38"/>
+          </a:solidFill>
+          <a:ln>
+            <a:noFill/>
+          </a:ln>
+          <a:effectLst/>
+        </p:spPr>
+        <p:style>
+          <a:lnRef idx="1">
+            <a:schemeClr val="accent1"/>
+          </a:lnRef>
+          <a:fillRef idx="3">
+            <a:schemeClr val="accent1"/>
+          </a:fillRef>
+          <a:effectRef idx="2">
+            <a:schemeClr val="accent1"/>
+          </a:effectRef>
+          <a:fontRef idx="minor">
+            <a:schemeClr val="lt1"/>
+          </a:fontRef>
+        </p:style>
+        <p:txBody>
+          <a:bodyPr rtlCol="0" anchor="ctr"/>
+          <a:lstStyle/>
+          <a:p>
+            <a:pPr algn="ctr"/>
+            <a:endParaRPr/>
+          </a:p>
+        </p:txBody>
+      </p:sp>
+      <p:sp>
+        <p:nvSpPr>
+          <p:cNvPr id="16" name="TextBox 15"/>
           <p:cNvSpPr txBox="1"/>
           <p:nvPr/>
         </p:nvSpPr>
         <p:spPr>
           <a:xfrm>
-            <a:off x="9601200" y="1463040"/>
-            <a:ext cx="2011680" cy="640080"/>
+            <a:off x="6492240" y="3291840"/>
+            <a:ext cx="2743200" cy="365760"/>
           </a:xfrm>
           <a:prstGeom prst="rect">
             <a:avLst/>
@@ -6711,66 +6483,30 @@
           </a:bodyPr>
           <a:lstStyle/>
           <a:p>
-            <a:pPr algn="ctr">
-              <a:defRPr sz="3200" b="0">
-                <a:solidFill>
-                  <a:srgbClr val="FFFFFF"/>
-                </a:solidFill>
-                <a:latin typeface="Calibri"/>
-              </a:defRPr>
-            </a:pPr>
-            <a:r>
-              <a:t>🐛</a:t>
-            </a:r>
-          </a:p>
-        </p:txBody>
-      </p:sp>
-      <p:sp>
-        <p:nvSpPr>
-          <p:cNvPr id="30" name="TextBox 29"/>
-          <p:cNvSpPr txBox="1"/>
-          <p:nvPr/>
-        </p:nvSpPr>
-        <p:spPr>
-          <a:xfrm>
-            <a:off x="9601200" y="2011680"/>
-            <a:ext cx="2011680" cy="457200"/>
-          </a:xfrm>
-          <a:prstGeom prst="rect">
-            <a:avLst/>
-          </a:prstGeom>
-          <a:noFill/>
-        </p:spPr>
-        <p:txBody>
-          <a:bodyPr wrap="square">
-            <a:spAutoFit/>
-          </a:bodyPr>
-          <a:lstStyle/>
-          <a:p>
-            <a:pPr algn="ctr">
+            <a:pPr algn="l">
               <a:defRPr sz="1600" b="1">
                 <a:solidFill>
-                  <a:srgbClr val="FFFFFF"/>
-                </a:solidFill>
-                <a:latin typeface="Calibri"/>
-              </a:defRPr>
-            </a:pPr>
-            <a:r>
-              <a:t>Debugger</a:t>
-            </a:r>
-          </a:p>
-        </p:txBody>
-      </p:sp>
-      <p:sp>
-        <p:nvSpPr>
-          <p:cNvPr id="31" name="Rounded Rectangle 30"/>
+                  <a:srgbClr val="E94560"/>
+                </a:solidFill>
+                <a:latin typeface="Calibri"/>
+              </a:defRPr>
+            </a:pPr>
+            <a:r>
+              <a:t>Debug Feedback Loop</a:t>
+            </a:r>
+          </a:p>
+        </p:txBody>
+      </p:sp>
+      <p:sp>
+        <p:nvSpPr>
+          <p:cNvPr id="17" name="Rounded Rectangle 16"/>
           <p:cNvSpPr/>
           <p:nvPr/>
         </p:nvSpPr>
         <p:spPr>
           <a:xfrm>
-            <a:off x="9875520" y="2514600"/>
-            <a:ext cx="1463040" cy="320040"/>
+            <a:off x="6583680" y="3840480"/>
+            <a:ext cx="2560320" cy="640080"/>
           </a:xfrm>
           <a:prstGeom prst="roundRect">
             <a:avLst/>
@@ -6802,7 +6538,7 @@
           <a:lstStyle/>
           <a:p>
             <a:pPr algn="ctr">
-              <a:defRPr sz="1000">
+              <a:defRPr sz="1300" b="1">
                 <a:solidFill>
                   <a:srgbClr val="FFFFFF"/>
                 </a:solidFill>
@@ -6810,21 +6546,21 @@
               </a:defRPr>
             </a:pPr>
             <a:r>
-              <a:t>Implementation</a:t>
-            </a:r>
-          </a:p>
-        </p:txBody>
-      </p:sp>
-      <p:sp>
-        <p:nvSpPr>
-          <p:cNvPr id="32" name="TextBox 31"/>
+              <a:t>Debugger</a:t>
+            </a:r>
+          </a:p>
+        </p:txBody>
+      </p:sp>
+      <p:sp>
+        <p:nvSpPr>
+          <p:cNvPr id="18" name="TextBox 17"/>
           <p:cNvSpPr txBox="1"/>
           <p:nvPr/>
         </p:nvSpPr>
         <p:spPr>
           <a:xfrm>
-            <a:off x="9692640" y="3017520"/>
-            <a:ext cx="1828800" cy="365760"/>
+            <a:off x="6583680" y="4572000"/>
+            <a:ext cx="2560320" cy="731520"/>
           </a:xfrm>
           <a:prstGeom prst="rect">
             <a:avLst/>
@@ -6838,29 +6574,87 @@
           <a:lstStyle/>
           <a:p>
             <a:pPr algn="ctr">
-              <a:defRPr sz="1200" b="1">
-                <a:solidFill>
-                  <a:srgbClr val="00D2FF"/>
-                </a:solidFill>
-                <a:latin typeface="Calibri"/>
-              </a:defRPr>
-            </a:pPr>
-            <a:r>
-              <a:t>LLM (temp 0.3)</a:t>
-            </a:r>
-          </a:p>
-        </p:txBody>
-      </p:sp>
-      <p:sp>
-        <p:nvSpPr>
-          <p:cNvPr id="33" name="TextBox 32"/>
+              <a:defRPr sz="1200" b="0">
+                <a:solidFill>
+                  <a:srgbClr val="BBBBCC"/>
+                </a:solidFill>
+                <a:latin typeface="Calibri"/>
+              </a:defRPr>
+            </a:pPr>
+            <a:r>
+              <a:t>Config bugs (C1-C5)</a:t>
+            </a:r>
+            <a:br/>
+            <a:r>
+              <a:t>LLM temp 0.3, minimal fixes</a:t>
+            </a:r>
+          </a:p>
+        </p:txBody>
+      </p:sp>
+      <p:sp>
+        <p:nvSpPr>
+          <p:cNvPr id="19" name="Rounded Rectangle 18"/>
+          <p:cNvSpPr/>
+          <p:nvPr/>
+        </p:nvSpPr>
+        <p:spPr>
+          <a:xfrm>
+            <a:off x="9418320" y="3840480"/>
+            <a:ext cx="2560320" cy="640080"/>
+          </a:xfrm>
+          <a:prstGeom prst="roundRect">
+            <a:avLst/>
+          </a:prstGeom>
+          <a:solidFill>
+            <a:srgbClr val="2E86AB"/>
+          </a:solidFill>
+          <a:ln>
+            <a:noFill/>
+          </a:ln>
+          <a:effectLst/>
+        </p:spPr>
+        <p:style>
+          <a:lnRef idx="1">
+            <a:schemeClr val="accent1"/>
+          </a:lnRef>
+          <a:fillRef idx="3">
+            <a:schemeClr val="accent1"/>
+          </a:fillRef>
+          <a:effectRef idx="2">
+            <a:schemeClr val="accent1"/>
+          </a:effectRef>
+          <a:fontRef idx="minor">
+            <a:schemeClr val="lt1"/>
+          </a:fontRef>
+        </p:style>
+        <p:txBody>
+          <a:bodyPr rtlCol="0" anchor="ctr"/>
+          <a:lstStyle/>
+          <a:p>
+            <a:pPr algn="ctr">
+              <a:defRPr sz="1300" b="1">
+                <a:solidFill>
+                  <a:srgbClr val="FFFFFF"/>
+                </a:solidFill>
+                <a:latin typeface="Calibri"/>
+              </a:defRPr>
+            </a:pPr>
+            <a:r>
+              <a:t>Level Designer</a:t>
+            </a:r>
+          </a:p>
+        </p:txBody>
+      </p:sp>
+      <p:sp>
+        <p:nvSpPr>
+          <p:cNvPr id="20" name="TextBox 19"/>
           <p:cNvSpPr txBox="1"/>
           <p:nvPr/>
         </p:nvSpPr>
         <p:spPr>
           <a:xfrm>
-            <a:off x="9692640" y="3383280"/>
-            <a:ext cx="1828800" cy="2286000"/>
+            <a:off x="9418320" y="4572000"/>
+            <a:ext cx="2560320" cy="731520"/>
           </a:xfrm>
           <a:prstGeom prst="rect">
             <a:avLst/>
@@ -6874,7 +6668,7 @@
           <a:lstStyle/>
           <a:p>
             <a:pPr algn="ctr">
-              <a:defRPr sz="1300" b="0">
+              <a:defRPr sz="1200" b="0">
                 <a:solidFill>
                   <a:srgbClr val="BBBBCC"/>
                 </a:solidFill>
@@ -6882,11 +6676,217 @@
               </a:defRPr>
             </a:pPr>
             <a:r>
-              <a:t>Minimal config fixes</a:t>
+              <a:t>Design flaws (D1-D5)</a:t>
             </a:r>
             <a:br/>
             <a:r>
-              <a:t>25% tile change threshold</a:t>
+              <a:t>Redesign with solver feedback</a:t>
+            </a:r>
+          </a:p>
+        </p:txBody>
+      </p:sp>
+      <p:sp>
+        <p:nvSpPr>
+          <p:cNvPr id="21" name="Rounded Rectangle 20"/>
+          <p:cNvSpPr/>
+          <p:nvPr/>
+        </p:nvSpPr>
+        <p:spPr>
+          <a:xfrm>
+            <a:off x="274320" y="3200400"/>
+            <a:ext cx="5669280" cy="2926080"/>
+          </a:xfrm>
+          <a:prstGeom prst="roundRect">
+            <a:avLst/>
+          </a:prstGeom>
+          <a:solidFill>
+            <a:srgbClr val="1E1E38"/>
+          </a:solidFill>
+          <a:ln>
+            <a:noFill/>
+          </a:ln>
+          <a:effectLst/>
+        </p:spPr>
+        <p:style>
+          <a:lnRef idx="1">
+            <a:schemeClr val="accent1"/>
+          </a:lnRef>
+          <a:fillRef idx="3">
+            <a:schemeClr val="accent1"/>
+          </a:fillRef>
+          <a:effectRef idx="2">
+            <a:schemeClr val="accent1"/>
+          </a:effectRef>
+          <a:fontRef idx="minor">
+            <a:schemeClr val="lt1"/>
+          </a:fontRef>
+        </p:style>
+        <p:txBody>
+          <a:bodyPr rtlCol="0" anchor="ctr"/>
+          <a:lstStyle/>
+          <a:p>
+            <a:pPr algn="ctr"/>
+            <a:endParaRPr/>
+          </a:p>
+        </p:txBody>
+      </p:sp>
+      <p:sp>
+        <p:nvSpPr>
+          <p:cNvPr id="22" name="TextBox 21"/>
+          <p:cNvSpPr txBox="1"/>
+          <p:nvPr/>
+        </p:nvSpPr>
+        <p:spPr>
+          <a:xfrm>
+            <a:off x="457200" y="3291840"/>
+            <a:ext cx="2743200" cy="365760"/>
+          </a:xfrm>
+          <a:prstGeom prst="rect">
+            <a:avLst/>
+          </a:prstGeom>
+          <a:noFill/>
+        </p:spPr>
+        <p:txBody>
+          <a:bodyPr wrap="square">
+            <a:spAutoFit/>
+          </a:bodyPr>
+          <a:lstStyle/>
+          <a:p>
+            <a:pPr algn="l">
+              <a:defRPr sz="1600" b="1">
+                <a:solidFill>
+                  <a:srgbClr val="00D2FF"/>
+                </a:solidFill>
+                <a:latin typeface="Calibri"/>
+              </a:defRPr>
+            </a:pPr>
+            <a:r>
+              <a:t>Key Design Principle</a:t>
+            </a:r>
+          </a:p>
+        </p:txBody>
+      </p:sp>
+      <p:sp>
+        <p:nvSpPr>
+          <p:cNvPr id="23" name="TextBox 22"/>
+          <p:cNvSpPr txBox="1"/>
+          <p:nvPr/>
+        </p:nvSpPr>
+        <p:spPr>
+          <a:xfrm>
+            <a:off x="457200" y="3749039"/>
+            <a:ext cx="5303520" cy="2286000"/>
+          </a:xfrm>
+          <a:prstGeom prst="rect">
+            <a:avLst/>
+          </a:prstGeom>
+          <a:noFill/>
+        </p:spPr>
+        <p:txBody>
+          <a:bodyPr wrap="square">
+            <a:spAutoFit/>
+          </a:bodyPr>
+          <a:lstStyle/>
+          <a:p>
+            <a:pPr>
+              <a:spcAft>
+                <a:spcPts val="600"/>
+              </a:spcAft>
+            </a:pPr>
+            <a:r>
+              <a:rPr sz="1400">
+                <a:solidFill>
+                  <a:srgbClr val="00D2FF"/>
+                </a:solidFill>
+                <a:latin typeface="Calibri"/>
+              </a:rPr>
+              <a:t>   ▸  </a:t>
+            </a:r>
+            <a:r>
+              <a:rPr sz="1400">
+                <a:solidFill>
+                  <a:srgbClr val="FFFFFF"/>
+                </a:solidFill>
+                <a:latin typeface="Calibri"/>
+              </a:rPr>
+              <a:t>Deterministic where possible,
+LLM where necessary</a:t>
+            </a:r>
+          </a:p>
+          <a:p>
+            <a:pPr>
+              <a:spcAft>
+                <a:spcPts val="600"/>
+              </a:spcAft>
+            </a:pPr>
+            <a:r>
+              <a:rPr sz="1400">
+                <a:solidFill>
+                  <a:srgbClr val="00D2FF"/>
+                </a:solidFill>
+                <a:latin typeface="Calibri"/>
+              </a:rPr>
+              <a:t>   ▸  </a:t>
+            </a:r>
+            <a:r>
+              <a:rPr sz="1400">
+                <a:solidFill>
+                  <a:srgbClr val="FFFFFF"/>
+                </a:solidFill>
+                <a:latin typeface="Calibri"/>
+              </a:rPr>
+              <a:t>Solvability verified by BFS solver,
+not LLM judgment</a:t>
+            </a:r>
+          </a:p>
+          <a:p>
+            <a:pPr>
+              <a:spcAft>
+                <a:spcPts val="600"/>
+              </a:spcAft>
+            </a:pPr>
+            <a:r>
+              <a:rPr sz="1400">
+                <a:solidFill>
+                  <a:srgbClr val="00D2FF"/>
+                </a:solidFill>
+                <a:latin typeface="Calibri"/>
+              </a:rPr>
+              <a:t>   ▸  </a:t>
+            </a:r>
+            <a:r>
+              <a:rPr sz="1400">
+                <a:solidFill>
+                  <a:srgbClr val="FFFFFF"/>
+                </a:solidFill>
+                <a:latin typeface="Calibri"/>
+              </a:rPr>
+              <a:t>10 routing criteria -- all code, no LLM</a:t>
+            </a:r>
+          </a:p>
+          <a:p>
+            <a:pPr>
+              <a:spcAft>
+                <a:spcPts val="600"/>
+              </a:spcAft>
+            </a:pPr>
+            <a:r>
+              <a:rPr sz="1400">
+                <a:solidFill>
+                  <a:srgbClr val="00D2FF"/>
+                </a:solidFill>
+                <a:latin typeface="Calibri"/>
+              </a:rPr>
+              <a:t>   ▸  </a:t>
+            </a:r>
+            <a:r>
+              <a:rPr sz="1400">
+                <a:solidFill>
+                  <a:srgbClr val="FFFFFF"/>
+                </a:solidFill>
+                <a:latin typeface="Calibri"/>
+              </a:rPr>
+              <a:t>Max 3 debug cycles, 80K token budget</a:t>
             </a:r>
           </a:p>
         </p:txBody>
